--- a/Tutorial/OsarTutorial/04_KarplusStrongV2/audioWorklet.pptx
+++ b/Tutorial/OsarTutorial/04_KarplusStrongV2/audioWorklet.pptx
@@ -118,7 +118,7 @@
 <file path=ppt/revisionInfo.xml><?xml version="1.0" encoding="utf-8"?>
 <p1510:revInfo xmlns:a="http://schemas.openxmlformats.org/drawingml/2006/main" xmlns:r="http://schemas.openxmlformats.org/officeDocument/2006/relationships" xmlns:p1510="http://schemas.microsoft.com/office/powerpoint/2015/10/main">
   <p1510:revLst>
-    <p1510:client id="{2DD4C6F9-B693-482E-B1B8-D61335F4EE17}" v="1" dt="2025-07-23T10:21:46.483"/>
+    <p1510:client id="{8B99BD52-E18D-430E-B05F-F59F0BC5F161}" v="3" dt="2026-03-11T16:35:08.701"/>
   </p1510:revLst>
 </p1510:revInfo>
 </file>
@@ -126,205 +126,370 @@
 <file path=ppt/changesInfos/changesInfo1.xml><?xml version="1.0" encoding="utf-8"?>
 <pc:chgInfo xmlns:a="http://schemas.openxmlformats.org/drawingml/2006/main" xmlns:r="http://schemas.openxmlformats.org/officeDocument/2006/relationships" xmlns:ac="http://schemas.microsoft.com/office/drawing/2013/main/command" xmlns:pc="http://schemas.microsoft.com/office/powerpoint/2013/main/command">
   <pc:docChgLst>
-    <pc:chgData name="Joshua Reiss" userId="71f87c30-4769-4a42-a082-a6a82298c8cb" providerId="ADAL" clId="{2DD4C6F9-B693-482E-B1B8-D61335F4EE17}"/>
-    <pc:docChg chg="modSld">
-      <pc:chgData name="Joshua Reiss" userId="71f87c30-4769-4a42-a082-a6a82298c8cb" providerId="ADAL" clId="{2DD4C6F9-B693-482E-B1B8-D61335F4EE17}" dt="2025-07-23T10:21:46.483" v="0" actId="164"/>
+    <pc:chgData name="Josh Reiss" userId="71f87c30-4769-4a42-a082-a6a82298c8cb" providerId="ADAL" clId="{A0C6B147-1166-4B44-A00D-F3D77F199F8E}"/>
+    <pc:docChg chg="undo custSel modSld">
+      <pc:chgData name="Josh Reiss" userId="71f87c30-4769-4a42-a082-a6a82298c8cb" providerId="ADAL" clId="{A0C6B147-1166-4B44-A00D-F3D77F199F8E}" dt="2026-03-11T16:44:09.348" v="303" actId="1035"/>
       <pc:docMkLst>
         <pc:docMk/>
       </pc:docMkLst>
-      <pc:sldChg chg="addSp modSp">
-        <pc:chgData name="Joshua Reiss" userId="71f87c30-4769-4a42-a082-a6a82298c8cb" providerId="ADAL" clId="{2DD4C6F9-B693-482E-B1B8-D61335F4EE17}" dt="2025-07-23T10:21:46.483" v="0" actId="164"/>
-        <pc:sldMkLst>
-          <pc:docMk/>
-          <pc:sldMk cId="4287236545" sldId="352"/>
-        </pc:sldMkLst>
-        <pc:spChg chg="mod">
-          <ac:chgData name="Joshua Reiss" userId="71f87c30-4769-4a42-a082-a6a82298c8cb" providerId="ADAL" clId="{2DD4C6F9-B693-482E-B1B8-D61335F4EE17}" dt="2025-07-23T10:21:46.483" v="0" actId="164"/>
-          <ac:spMkLst>
-            <pc:docMk/>
-            <pc:sldMk cId="4287236545" sldId="352"/>
-            <ac:spMk id="8" creationId="{1A76E437-7554-4B56-C4E2-BB3C0E4AEA31}"/>
-          </ac:spMkLst>
-        </pc:spChg>
-        <pc:spChg chg="mod">
-          <ac:chgData name="Joshua Reiss" userId="71f87c30-4769-4a42-a082-a6a82298c8cb" providerId="ADAL" clId="{2DD4C6F9-B693-482E-B1B8-D61335F4EE17}" dt="2025-07-23T10:21:46.483" v="0" actId="164"/>
-          <ac:spMkLst>
-            <pc:docMk/>
-            <pc:sldMk cId="4287236545" sldId="352"/>
-            <ac:spMk id="9" creationId="{7D6EC9BA-C03E-26D1-FAD2-EAF6500A119B}"/>
-          </ac:spMkLst>
-        </pc:spChg>
-        <pc:spChg chg="mod">
-          <ac:chgData name="Joshua Reiss" userId="71f87c30-4769-4a42-a082-a6a82298c8cb" providerId="ADAL" clId="{2DD4C6F9-B693-482E-B1B8-D61335F4EE17}" dt="2025-07-23T10:21:46.483" v="0" actId="164"/>
-          <ac:spMkLst>
-            <pc:docMk/>
-            <pc:sldMk cId="4287236545" sldId="352"/>
-            <ac:spMk id="10" creationId="{B5081D72-5F55-AF7E-6F70-312422E679C4}"/>
-          </ac:spMkLst>
-        </pc:spChg>
-        <pc:spChg chg="mod">
-          <ac:chgData name="Joshua Reiss" userId="71f87c30-4769-4a42-a082-a6a82298c8cb" providerId="ADAL" clId="{2DD4C6F9-B693-482E-B1B8-D61335F4EE17}" dt="2025-07-23T10:21:46.483" v="0" actId="164"/>
-          <ac:spMkLst>
-            <pc:docMk/>
-            <pc:sldMk cId="4287236545" sldId="352"/>
-            <ac:spMk id="11" creationId="{02F4F030-6317-C08E-2981-31F49999B6D7}"/>
-          </ac:spMkLst>
-        </pc:spChg>
-        <pc:spChg chg="mod">
-          <ac:chgData name="Joshua Reiss" userId="71f87c30-4769-4a42-a082-a6a82298c8cb" providerId="ADAL" clId="{2DD4C6F9-B693-482E-B1B8-D61335F4EE17}" dt="2025-07-23T10:21:46.483" v="0" actId="164"/>
-          <ac:spMkLst>
-            <pc:docMk/>
-            <pc:sldMk cId="4287236545" sldId="352"/>
-            <ac:spMk id="16" creationId="{FEA53039-A3DB-31C0-15B9-B21868D43CCD}"/>
-          </ac:spMkLst>
-        </pc:spChg>
-        <pc:spChg chg="mod">
-          <ac:chgData name="Joshua Reiss" userId="71f87c30-4769-4a42-a082-a6a82298c8cb" providerId="ADAL" clId="{2DD4C6F9-B693-482E-B1B8-D61335F4EE17}" dt="2025-07-23T10:21:46.483" v="0" actId="164"/>
-          <ac:spMkLst>
-            <pc:docMk/>
-            <pc:sldMk cId="4287236545" sldId="352"/>
-            <ac:spMk id="19" creationId="{875DE4CB-A6E6-1D25-07A1-06577C926098}"/>
-          </ac:spMkLst>
-        </pc:spChg>
-        <pc:spChg chg="mod">
-          <ac:chgData name="Joshua Reiss" userId="71f87c30-4769-4a42-a082-a6a82298c8cb" providerId="ADAL" clId="{2DD4C6F9-B693-482E-B1B8-D61335F4EE17}" dt="2025-07-23T10:21:46.483" v="0" actId="164"/>
-          <ac:spMkLst>
-            <pc:docMk/>
-            <pc:sldMk cId="4287236545" sldId="352"/>
-            <ac:spMk id="22" creationId="{F0258842-9D83-3B98-6325-83CFFD82DFFC}"/>
-          </ac:spMkLst>
-        </pc:spChg>
-        <pc:grpChg chg="add mod">
-          <ac:chgData name="Joshua Reiss" userId="71f87c30-4769-4a42-a082-a6a82298c8cb" providerId="ADAL" clId="{2DD4C6F9-B693-482E-B1B8-D61335F4EE17}" dt="2025-07-23T10:21:46.483" v="0" actId="164"/>
-          <ac:grpSpMkLst>
-            <pc:docMk/>
-            <pc:sldMk cId="4287236545" sldId="352"/>
-            <ac:grpSpMk id="3" creationId="{8D9C7F2E-0DEE-BB09-7413-0E917DC97552}"/>
-          </ac:grpSpMkLst>
-        </pc:grpChg>
-        <pc:cxnChg chg="mod">
-          <ac:chgData name="Joshua Reiss" userId="71f87c30-4769-4a42-a082-a6a82298c8cb" providerId="ADAL" clId="{2DD4C6F9-B693-482E-B1B8-D61335F4EE17}" dt="2025-07-23T10:21:46.483" v="0" actId="164"/>
-          <ac:cxnSpMkLst>
-            <pc:docMk/>
-            <pc:sldMk cId="4287236545" sldId="352"/>
-            <ac:cxnSpMk id="15" creationId="{53D14D3D-1A10-DEA6-230D-5D42A8C50CD6}"/>
-          </ac:cxnSpMkLst>
-        </pc:cxnChg>
-        <pc:cxnChg chg="mod">
-          <ac:chgData name="Joshua Reiss" userId="71f87c30-4769-4a42-a082-a6a82298c8cb" providerId="ADAL" clId="{2DD4C6F9-B693-482E-B1B8-D61335F4EE17}" dt="2025-07-23T10:21:46.483" v="0" actId="164"/>
-          <ac:cxnSpMkLst>
-            <pc:docMk/>
-            <pc:sldMk cId="4287236545" sldId="352"/>
-            <ac:cxnSpMk id="23" creationId="{106AF0D4-0CD4-4EBB-E52E-C99FEA52B677}"/>
-          </ac:cxnSpMkLst>
-        </pc:cxnChg>
-      </pc:sldChg>
-    </pc:docChg>
-  </pc:docChgLst>
-  <pc:docChgLst>
-    <pc:chgData name="Joshua Reiss" userId="71f87c30-4769-4a42-a082-a6a82298c8cb" providerId="ADAL" clId="{D788B803-6CAF-456E-9D5B-399D0D7F1309}"/>
-    <pc:docChg chg="undo custSel addSld delSld modSld">
-      <pc:chgData name="Joshua Reiss" userId="71f87c30-4769-4a42-a082-a6a82298c8cb" providerId="ADAL" clId="{D788B803-6CAF-456E-9D5B-399D0D7F1309}" dt="2025-04-02T15:03:00.425" v="2167" actId="692"/>
-      <pc:docMkLst>
-        <pc:docMk/>
-      </pc:docMkLst>
-      <pc:sldChg chg="modSp add">
-        <pc:chgData name="Joshua Reiss" userId="71f87c30-4769-4a42-a082-a6a82298c8cb" providerId="ADAL" clId="{D788B803-6CAF-456E-9D5B-399D0D7F1309}" dt="2025-03-13T14:44:17.415" v="200" actId="5736"/>
-        <pc:sldMkLst>
-          <pc:docMk/>
-          <pc:sldMk cId="1710399065" sldId="272"/>
-        </pc:sldMkLst>
-      </pc:sldChg>
-      <pc:sldChg chg="add">
-        <pc:chgData name="Joshua Reiss" userId="71f87c30-4769-4a42-a082-a6a82298c8cb" providerId="ADAL" clId="{D788B803-6CAF-456E-9D5B-399D0D7F1309}" dt="2025-03-13T13:04:18.144" v="199"/>
-        <pc:sldMkLst>
-          <pc:docMk/>
-          <pc:sldMk cId="2879517915" sldId="273"/>
-        </pc:sldMkLst>
-      </pc:sldChg>
-      <pc:sldChg chg="add">
-        <pc:chgData name="Joshua Reiss" userId="71f87c30-4769-4a42-a082-a6a82298c8cb" providerId="ADAL" clId="{D788B803-6CAF-456E-9D5B-399D0D7F1309}" dt="2025-03-13T13:04:18.144" v="199"/>
-        <pc:sldMkLst>
-          <pc:docMk/>
-          <pc:sldMk cId="90723974" sldId="278"/>
-        </pc:sldMkLst>
-      </pc:sldChg>
-      <pc:sldChg chg="add">
-        <pc:chgData name="Joshua Reiss" userId="71f87c30-4769-4a42-a082-a6a82298c8cb" providerId="ADAL" clId="{D788B803-6CAF-456E-9D5B-399D0D7F1309}" dt="2025-03-13T13:04:18.144" v="199"/>
-        <pc:sldMkLst>
-          <pc:docMk/>
-          <pc:sldMk cId="1496450886" sldId="305"/>
-        </pc:sldMkLst>
-      </pc:sldChg>
-      <pc:sldChg chg="add">
-        <pc:chgData name="Joshua Reiss" userId="71f87c30-4769-4a42-a082-a6a82298c8cb" providerId="ADAL" clId="{D788B803-6CAF-456E-9D5B-399D0D7F1309}" dt="2025-03-13T13:04:18.144" v="199"/>
-        <pc:sldMkLst>
-          <pc:docMk/>
-          <pc:sldMk cId="1320625119" sldId="306"/>
-        </pc:sldMkLst>
-      </pc:sldChg>
-      <pc:sldChg chg="add">
-        <pc:chgData name="Joshua Reiss" userId="71f87c30-4769-4a42-a082-a6a82298c8cb" providerId="ADAL" clId="{D788B803-6CAF-456E-9D5B-399D0D7F1309}" dt="2025-03-13T13:04:18.144" v="199"/>
-        <pc:sldMkLst>
-          <pc:docMk/>
-          <pc:sldMk cId="2261269671" sldId="311"/>
-        </pc:sldMkLst>
-      </pc:sldChg>
-      <pc:sldChg chg="modSp mod">
-        <pc:chgData name="Joshua Reiss" userId="71f87c30-4769-4a42-a082-a6a82298c8cb" providerId="ADAL" clId="{D788B803-6CAF-456E-9D5B-399D0D7F1309}" dt="2025-03-13T20:53:53.421" v="209" actId="1036"/>
-        <pc:sldMkLst>
-          <pc:docMk/>
-          <pc:sldMk cId="1068395398" sldId="351"/>
-        </pc:sldMkLst>
-      </pc:sldChg>
-      <pc:sldChg chg="addSp delSp modSp new mod">
-        <pc:chgData name="Joshua Reiss" userId="71f87c30-4769-4a42-a082-a6a82298c8cb" providerId="ADAL" clId="{D788B803-6CAF-456E-9D5B-399D0D7F1309}" dt="2025-03-12T13:16:47.584" v="198" actId="207"/>
+      <pc:sldChg chg="addSp delSp modSp mod">
+        <pc:chgData name="Josh Reiss" userId="71f87c30-4769-4a42-a082-a6a82298c8cb" providerId="ADAL" clId="{A0C6B147-1166-4B44-A00D-F3D77F199F8E}" dt="2026-03-11T16:44:09.348" v="303" actId="1035"/>
         <pc:sldMkLst>
           <pc:docMk/>
           <pc:sldMk cId="3176130722" sldId="362"/>
         </pc:sldMkLst>
-      </pc:sldChg>
-      <pc:sldChg chg="add">
-        <pc:chgData name="Joshua Reiss" userId="71f87c30-4769-4a42-a082-a6a82298c8cb" providerId="ADAL" clId="{D788B803-6CAF-456E-9D5B-399D0D7F1309}" dt="2025-03-13T13:04:18.144" v="199"/>
-        <pc:sldMkLst>
-          <pc:docMk/>
-          <pc:sldMk cId="23973663" sldId="363"/>
-        </pc:sldMkLst>
-      </pc:sldChg>
-      <pc:sldChg chg="add del">
-        <pc:chgData name="Joshua Reiss" userId="71f87c30-4769-4a42-a082-a6a82298c8cb" providerId="ADAL" clId="{D788B803-6CAF-456E-9D5B-399D0D7F1309}" dt="2025-03-14T21:23:05.601" v="211"/>
-        <pc:sldMkLst>
-          <pc:docMk/>
-          <pc:sldMk cId="1769010252" sldId="364"/>
-        </pc:sldMkLst>
-      </pc:sldChg>
-      <pc:sldChg chg="addSp delSp modSp add mod">
-        <pc:chgData name="Joshua Reiss" userId="71f87c30-4769-4a42-a082-a6a82298c8cb" providerId="ADAL" clId="{D788B803-6CAF-456E-9D5B-399D0D7F1309}" dt="2025-03-14T21:37:44.031" v="505" actId="20577"/>
-        <pc:sldMkLst>
-          <pc:docMk/>
-          <pc:sldMk cId="2016982695" sldId="364"/>
-        </pc:sldMkLst>
-      </pc:sldChg>
-      <pc:sldChg chg="addSp delSp modSp add mod">
-        <pc:chgData name="Joshua Reiss" userId="71f87c30-4769-4a42-a082-a6a82298c8cb" providerId="ADAL" clId="{D788B803-6CAF-456E-9D5B-399D0D7F1309}" dt="2025-03-22T11:29:57.645" v="1202" actId="1076"/>
-        <pc:sldMkLst>
-          <pc:docMk/>
-          <pc:sldMk cId="201943988" sldId="365"/>
-        </pc:sldMkLst>
-      </pc:sldChg>
-      <pc:sldChg chg="addSp delSp modSp add mod">
-        <pc:chgData name="Joshua Reiss" userId="71f87c30-4769-4a42-a082-a6a82298c8cb" providerId="ADAL" clId="{D788B803-6CAF-456E-9D5B-399D0D7F1309}" dt="2025-03-23T09:26:15.203" v="1445" actId="1076"/>
-        <pc:sldMkLst>
-          <pc:docMk/>
-          <pc:sldMk cId="1978429239" sldId="366"/>
-        </pc:sldMkLst>
-      </pc:sldChg>
-      <pc:sldChg chg="addSp delSp modSp add mod">
-        <pc:chgData name="Joshua Reiss" userId="71f87c30-4769-4a42-a082-a6a82298c8cb" providerId="ADAL" clId="{D788B803-6CAF-456E-9D5B-399D0D7F1309}" dt="2025-04-02T15:03:00.425" v="2167" actId="692"/>
-        <pc:sldMkLst>
-          <pc:docMk/>
-          <pc:sldMk cId="361188305" sldId="367"/>
-        </pc:sldMkLst>
+        <pc:spChg chg="del">
+          <ac:chgData name="Josh Reiss" userId="71f87c30-4769-4a42-a082-a6a82298c8cb" providerId="ADAL" clId="{A0C6B147-1166-4B44-A00D-F3D77F199F8E}" dt="2026-03-11T16:32:19.040" v="183" actId="478"/>
+          <ac:spMkLst>
+            <pc:docMk/>
+            <pc:sldMk cId="3176130722" sldId="362"/>
+            <ac:spMk id="3" creationId="{A9DC1AE9-8DA4-A0BD-B4EB-6D713DE8AD65}"/>
+          </ac:spMkLst>
+        </pc:spChg>
+        <pc:spChg chg="del mod">
+          <ac:chgData name="Josh Reiss" userId="71f87c30-4769-4a42-a082-a6a82298c8cb" providerId="ADAL" clId="{A0C6B147-1166-4B44-A00D-F3D77F199F8E}" dt="2026-03-11T16:43:52.355" v="293" actId="478"/>
+          <ac:spMkLst>
+            <pc:docMk/>
+            <pc:sldMk cId="3176130722" sldId="362"/>
+            <ac:spMk id="4" creationId="{3F846BC9-EFB3-98C5-1EC0-AE9D268CBFC5}"/>
+          </ac:spMkLst>
+        </pc:spChg>
+        <pc:spChg chg="add mod">
+          <ac:chgData name="Josh Reiss" userId="71f87c30-4769-4a42-a082-a6a82298c8cb" providerId="ADAL" clId="{A0C6B147-1166-4B44-A00D-F3D77F199F8E}" dt="2026-03-11T16:37:23.573" v="254" actId="1036"/>
+          <ac:spMkLst>
+            <pc:docMk/>
+            <pc:sldMk cId="3176130722" sldId="362"/>
+            <ac:spMk id="5" creationId="{70C06A64-535C-81DB-DA43-A14F8BD51314}"/>
+          </ac:spMkLst>
+        </pc:spChg>
+        <pc:spChg chg="del mod">
+          <ac:chgData name="Josh Reiss" userId="71f87c30-4769-4a42-a082-a6a82298c8cb" providerId="ADAL" clId="{A0C6B147-1166-4B44-A00D-F3D77F199F8E}" dt="2026-03-11T16:43:44.172" v="292" actId="478"/>
+          <ac:spMkLst>
+            <pc:docMk/>
+            <pc:sldMk cId="3176130722" sldId="362"/>
+            <ac:spMk id="6" creationId="{D8A29253-740B-C0CC-7814-A95752B53C97}"/>
+          </ac:spMkLst>
+        </pc:spChg>
+        <pc:spChg chg="del mod">
+          <ac:chgData name="Josh Reiss" userId="71f87c30-4769-4a42-a082-a6a82298c8cb" providerId="ADAL" clId="{A0C6B147-1166-4B44-A00D-F3D77F199F8E}" dt="2026-03-11T16:43:44.172" v="292" actId="478"/>
+          <ac:spMkLst>
+            <pc:docMk/>
+            <pc:sldMk cId="3176130722" sldId="362"/>
+            <ac:spMk id="7" creationId="{433D80D1-16F4-FC89-CCA7-62588BC5C68F}"/>
+          </ac:spMkLst>
+        </pc:spChg>
+        <pc:spChg chg="del mod">
+          <ac:chgData name="Josh Reiss" userId="71f87c30-4769-4a42-a082-a6a82298c8cb" providerId="ADAL" clId="{A0C6B147-1166-4B44-A00D-F3D77F199F8E}" dt="2026-03-11T16:43:44.172" v="292" actId="478"/>
+          <ac:spMkLst>
+            <pc:docMk/>
+            <pc:sldMk cId="3176130722" sldId="362"/>
+            <ac:spMk id="12" creationId="{52F90E31-3D83-AAB9-76EC-A3A3A0DC8D66}"/>
+          </ac:spMkLst>
+        </pc:spChg>
+        <pc:spChg chg="del mod">
+          <ac:chgData name="Josh Reiss" userId="71f87c30-4769-4a42-a082-a6a82298c8cb" providerId="ADAL" clId="{A0C6B147-1166-4B44-A00D-F3D77F199F8E}" dt="2026-03-11T16:43:52.355" v="293" actId="478"/>
+          <ac:spMkLst>
+            <pc:docMk/>
+            <pc:sldMk cId="3176130722" sldId="362"/>
+            <ac:spMk id="14" creationId="{0C7ADD34-2607-0525-4CE5-8D48E3FF3A6E}"/>
+          </ac:spMkLst>
+        </pc:spChg>
+        <pc:spChg chg="del mod">
+          <ac:chgData name="Josh Reiss" userId="71f87c30-4769-4a42-a082-a6a82298c8cb" providerId="ADAL" clId="{A0C6B147-1166-4B44-A00D-F3D77F199F8E}" dt="2026-03-11T16:43:44.172" v="292" actId="478"/>
+          <ac:spMkLst>
+            <pc:docMk/>
+            <pc:sldMk cId="3176130722" sldId="362"/>
+            <ac:spMk id="16" creationId="{7A014B07-D770-F62D-52B0-0A233060167C}"/>
+          </ac:spMkLst>
+        </pc:spChg>
+        <pc:spChg chg="add mod">
+          <ac:chgData name="Josh Reiss" userId="71f87c30-4769-4a42-a082-a6a82298c8cb" providerId="ADAL" clId="{A0C6B147-1166-4B44-A00D-F3D77F199F8E}" dt="2026-03-11T16:37:23.573" v="254" actId="1036"/>
+          <ac:spMkLst>
+            <pc:docMk/>
+            <pc:sldMk cId="3176130722" sldId="362"/>
+            <ac:spMk id="17" creationId="{07A51429-21DD-6527-D786-A6BEF96EB071}"/>
+          </ac:spMkLst>
+        </pc:spChg>
+        <pc:spChg chg="add mod">
+          <ac:chgData name="Josh Reiss" userId="71f87c30-4769-4a42-a082-a6a82298c8cb" providerId="ADAL" clId="{A0C6B147-1166-4B44-A00D-F3D77F199F8E}" dt="2026-03-11T16:37:23.573" v="254" actId="1036"/>
+          <ac:spMkLst>
+            <pc:docMk/>
+            <pc:sldMk cId="3176130722" sldId="362"/>
+            <ac:spMk id="18" creationId="{8F98C744-E435-8A88-D120-E83A2AB68262}"/>
+          </ac:spMkLst>
+        </pc:spChg>
+        <pc:spChg chg="del mod">
+          <ac:chgData name="Josh Reiss" userId="71f87c30-4769-4a42-a082-a6a82298c8cb" providerId="ADAL" clId="{A0C6B147-1166-4B44-A00D-F3D77F199F8E}" dt="2026-03-11T16:43:52.355" v="293" actId="478"/>
+          <ac:spMkLst>
+            <pc:docMk/>
+            <pc:sldMk cId="3176130722" sldId="362"/>
+            <ac:spMk id="20" creationId="{C81B9FC7-1020-C2CA-6424-B66FD5C36364}"/>
+          </ac:spMkLst>
+        </pc:spChg>
+        <pc:spChg chg="del mod">
+          <ac:chgData name="Josh Reiss" userId="71f87c30-4769-4a42-a082-a6a82298c8cb" providerId="ADAL" clId="{A0C6B147-1166-4B44-A00D-F3D77F199F8E}" dt="2026-03-11T16:43:44.172" v="292" actId="478"/>
+          <ac:spMkLst>
+            <pc:docMk/>
+            <pc:sldMk cId="3176130722" sldId="362"/>
+            <ac:spMk id="21" creationId="{02AEF672-FD85-2390-0514-6C60008062CC}"/>
+          </ac:spMkLst>
+        </pc:spChg>
+        <pc:spChg chg="del mod">
+          <ac:chgData name="Josh Reiss" userId="71f87c30-4769-4a42-a082-a6a82298c8cb" providerId="ADAL" clId="{A0C6B147-1166-4B44-A00D-F3D77F199F8E}" dt="2026-03-11T16:43:44.172" v="292" actId="478"/>
+          <ac:spMkLst>
+            <pc:docMk/>
+            <pc:sldMk cId="3176130722" sldId="362"/>
+            <ac:spMk id="22" creationId="{4D5F2028-8EAF-7477-3891-F280EE312EED}"/>
+          </ac:spMkLst>
+        </pc:spChg>
+        <pc:spChg chg="add mod">
+          <ac:chgData name="Josh Reiss" userId="71f87c30-4769-4a42-a082-a6a82298c8cb" providerId="ADAL" clId="{A0C6B147-1166-4B44-A00D-F3D77F199F8E}" dt="2026-03-11T16:37:23.573" v="254" actId="1036"/>
+          <ac:spMkLst>
+            <pc:docMk/>
+            <pc:sldMk cId="3176130722" sldId="362"/>
+            <ac:spMk id="27" creationId="{8F04EF52-523D-08EA-E57F-EE00EAF097DB}"/>
+          </ac:spMkLst>
+        </pc:spChg>
+        <pc:spChg chg="del mod">
+          <ac:chgData name="Josh Reiss" userId="71f87c30-4769-4a42-a082-a6a82298c8cb" providerId="ADAL" clId="{A0C6B147-1166-4B44-A00D-F3D77F199F8E}" dt="2026-03-11T16:43:52.355" v="293" actId="478"/>
+          <ac:spMkLst>
+            <pc:docMk/>
+            <pc:sldMk cId="3176130722" sldId="362"/>
+            <ac:spMk id="29" creationId="{8EC90D21-11C0-502E-32CF-9C0032B39F3B}"/>
+          </ac:spMkLst>
+        </pc:spChg>
+        <pc:spChg chg="add mod">
+          <ac:chgData name="Josh Reiss" userId="71f87c30-4769-4a42-a082-a6a82298c8cb" providerId="ADAL" clId="{A0C6B147-1166-4B44-A00D-F3D77F199F8E}" dt="2026-03-11T16:37:23.573" v="254" actId="1036"/>
+          <ac:spMkLst>
+            <pc:docMk/>
+            <pc:sldMk cId="3176130722" sldId="362"/>
+            <ac:spMk id="32" creationId="{6D2F7852-878B-19B4-8961-B4D5DC69C117}"/>
+          </ac:spMkLst>
+        </pc:spChg>
+        <pc:spChg chg="add del mod">
+          <ac:chgData name="Josh Reiss" userId="71f87c30-4769-4a42-a082-a6a82298c8cb" providerId="ADAL" clId="{A0C6B147-1166-4B44-A00D-F3D77F199F8E}" dt="2026-03-11T16:44:09.348" v="303" actId="1035"/>
+          <ac:spMkLst>
+            <pc:docMk/>
+            <pc:sldMk cId="3176130722" sldId="362"/>
+            <ac:spMk id="35" creationId="{2EF6D3CA-5FF5-D495-5D1C-8E347075C9CB}"/>
+          </ac:spMkLst>
+        </pc:spChg>
+        <pc:spChg chg="add del mod">
+          <ac:chgData name="Josh Reiss" userId="71f87c30-4769-4a42-a082-a6a82298c8cb" providerId="ADAL" clId="{A0C6B147-1166-4B44-A00D-F3D77F199F8E}" dt="2026-03-11T16:30:04.373" v="139" actId="478"/>
+          <ac:spMkLst>
+            <pc:docMk/>
+            <pc:sldMk cId="3176130722" sldId="362"/>
+            <ac:spMk id="36" creationId="{E4DDB069-7A65-516F-FDE3-3186BD2E5185}"/>
+          </ac:spMkLst>
+        </pc:spChg>
+        <pc:spChg chg="add mod">
+          <ac:chgData name="Josh Reiss" userId="71f87c30-4769-4a42-a082-a6a82298c8cb" providerId="ADAL" clId="{A0C6B147-1166-4B44-A00D-F3D77F199F8E}" dt="2026-03-11T16:44:09.348" v="303" actId="1035"/>
+          <ac:spMkLst>
+            <pc:docMk/>
+            <pc:sldMk cId="3176130722" sldId="362"/>
+            <ac:spMk id="37" creationId="{5F7E456B-CB93-A977-19F9-11D9EDA80D6F}"/>
+          </ac:spMkLst>
+        </pc:spChg>
+        <pc:spChg chg="add del mod">
+          <ac:chgData name="Josh Reiss" userId="71f87c30-4769-4a42-a082-a6a82298c8cb" providerId="ADAL" clId="{A0C6B147-1166-4B44-A00D-F3D77F199F8E}" dt="2026-03-11T16:29:07.558" v="100" actId="478"/>
+          <ac:spMkLst>
+            <pc:docMk/>
+            <pc:sldMk cId="3176130722" sldId="362"/>
+            <ac:spMk id="42" creationId="{15E8D877-C24B-42A3-D37D-E62382563824}"/>
+          </ac:spMkLst>
+        </pc:spChg>
+        <pc:spChg chg="add mod">
+          <ac:chgData name="Josh Reiss" userId="71f87c30-4769-4a42-a082-a6a82298c8cb" providerId="ADAL" clId="{A0C6B147-1166-4B44-A00D-F3D77F199F8E}" dt="2026-03-11T16:44:09.348" v="303" actId="1035"/>
+          <ac:spMkLst>
+            <pc:docMk/>
+            <pc:sldMk cId="3176130722" sldId="362"/>
+            <ac:spMk id="44" creationId="{5773FF25-9EB6-3A51-CED1-AF63D85A4777}"/>
+          </ac:spMkLst>
+        </pc:spChg>
+        <pc:spChg chg="add del mod">
+          <ac:chgData name="Josh Reiss" userId="71f87c30-4769-4a42-a082-a6a82298c8cb" providerId="ADAL" clId="{A0C6B147-1166-4B44-A00D-F3D77F199F8E}" dt="2026-03-11T16:36:52.062" v="232" actId="478"/>
+          <ac:spMkLst>
+            <pc:docMk/>
+            <pc:sldMk cId="3176130722" sldId="362"/>
+            <ac:spMk id="62" creationId="{A5AF7C29-8A85-432F-D9A8-A9DF165ED48A}"/>
+          </ac:spMkLst>
+        </pc:spChg>
+        <pc:spChg chg="add mod">
+          <ac:chgData name="Josh Reiss" userId="71f87c30-4769-4a42-a082-a6a82298c8cb" providerId="ADAL" clId="{A0C6B147-1166-4B44-A00D-F3D77F199F8E}" dt="2026-03-11T16:43:18.130" v="274" actId="692"/>
+          <ac:spMkLst>
+            <pc:docMk/>
+            <pc:sldMk cId="3176130722" sldId="362"/>
+            <ac:spMk id="64" creationId="{8A1EDE7D-7A8E-E572-6B07-6181CEEA4F86}"/>
+          </ac:spMkLst>
+        </pc:spChg>
+        <pc:cxnChg chg="del mod">
+          <ac:chgData name="Josh Reiss" userId="71f87c30-4769-4a42-a082-a6a82298c8cb" providerId="ADAL" clId="{A0C6B147-1166-4B44-A00D-F3D77F199F8E}" dt="2026-03-11T16:43:44.172" v="292" actId="478"/>
+          <ac:cxnSpMkLst>
+            <pc:docMk/>
+            <pc:sldMk cId="3176130722" sldId="362"/>
+            <ac:cxnSpMk id="9" creationId="{FFC36A61-7079-C397-7022-FA7FDD56CA6E}"/>
+          </ac:cxnSpMkLst>
+        </pc:cxnChg>
+        <pc:cxnChg chg="del mod">
+          <ac:chgData name="Josh Reiss" userId="71f87c30-4769-4a42-a082-a6a82298c8cb" providerId="ADAL" clId="{A0C6B147-1166-4B44-A00D-F3D77F199F8E}" dt="2026-03-11T16:43:44.172" v="292" actId="478"/>
+          <ac:cxnSpMkLst>
+            <pc:docMk/>
+            <pc:sldMk cId="3176130722" sldId="362"/>
+            <ac:cxnSpMk id="10" creationId="{BD85C650-5466-D425-6E33-6824E7A3F418}"/>
+          </ac:cxnSpMkLst>
+        </pc:cxnChg>
+        <pc:cxnChg chg="del mod">
+          <ac:chgData name="Josh Reiss" userId="71f87c30-4769-4a42-a082-a6a82298c8cb" providerId="ADAL" clId="{A0C6B147-1166-4B44-A00D-F3D77F199F8E}" dt="2026-03-11T16:43:44.172" v="292" actId="478"/>
+          <ac:cxnSpMkLst>
+            <pc:docMk/>
+            <pc:sldMk cId="3176130722" sldId="362"/>
+            <ac:cxnSpMk id="11" creationId="{5E4D74EE-2E17-24D1-6C1E-6657C11EC8D6}"/>
+          </ac:cxnSpMkLst>
+        </pc:cxnChg>
+        <pc:cxnChg chg="del mod">
+          <ac:chgData name="Josh Reiss" userId="71f87c30-4769-4a42-a082-a6a82298c8cb" providerId="ADAL" clId="{A0C6B147-1166-4B44-A00D-F3D77F199F8E}" dt="2026-03-11T16:43:44.172" v="292" actId="478"/>
+          <ac:cxnSpMkLst>
+            <pc:docMk/>
+            <pc:sldMk cId="3176130722" sldId="362"/>
+            <ac:cxnSpMk id="13" creationId="{6456C4B5-9423-DB9C-C80B-1725F63772E3}"/>
+          </ac:cxnSpMkLst>
+        </pc:cxnChg>
+        <pc:cxnChg chg="del mod">
+          <ac:chgData name="Josh Reiss" userId="71f87c30-4769-4a42-a082-a6a82298c8cb" providerId="ADAL" clId="{A0C6B147-1166-4B44-A00D-F3D77F199F8E}" dt="2026-03-11T16:43:52.355" v="293" actId="478"/>
+          <ac:cxnSpMkLst>
+            <pc:docMk/>
+            <pc:sldMk cId="3176130722" sldId="362"/>
+            <ac:cxnSpMk id="15" creationId="{463F40BF-487C-70FE-4BB1-6A7705371D21}"/>
+          </ac:cxnSpMkLst>
+        </pc:cxnChg>
+        <pc:cxnChg chg="add mod">
+          <ac:chgData name="Josh Reiss" userId="71f87c30-4769-4a42-a082-a6a82298c8cb" providerId="ADAL" clId="{A0C6B147-1166-4B44-A00D-F3D77F199F8E}" dt="2026-03-11T16:37:23.573" v="254" actId="1036"/>
+          <ac:cxnSpMkLst>
+            <pc:docMk/>
+            <pc:sldMk cId="3176130722" sldId="362"/>
+            <ac:cxnSpMk id="19" creationId="{A8881661-0E5C-F923-1D2B-ED8A416807BD}"/>
+          </ac:cxnSpMkLst>
+        </pc:cxnChg>
+        <pc:cxnChg chg="add mod">
+          <ac:chgData name="Josh Reiss" userId="71f87c30-4769-4a42-a082-a6a82298c8cb" providerId="ADAL" clId="{A0C6B147-1166-4B44-A00D-F3D77F199F8E}" dt="2026-03-11T16:37:23.573" v="254" actId="1036"/>
+          <ac:cxnSpMkLst>
+            <pc:docMk/>
+            <pc:sldMk cId="3176130722" sldId="362"/>
+            <ac:cxnSpMk id="24" creationId="{8FCDFAD5-0D34-E4F5-4E38-E7D4F458DF60}"/>
+          </ac:cxnSpMkLst>
+        </pc:cxnChg>
+        <pc:cxnChg chg="mod">
+          <ac:chgData name="Josh Reiss" userId="71f87c30-4769-4a42-a082-a6a82298c8cb" providerId="ADAL" clId="{A0C6B147-1166-4B44-A00D-F3D77F199F8E}" dt="2026-03-11T16:33:07.543" v="201" actId="14100"/>
+          <ac:cxnSpMkLst>
+            <pc:docMk/>
+            <pc:sldMk cId="3176130722" sldId="362"/>
+            <ac:cxnSpMk id="25" creationId="{C94A2F26-51F0-59EA-099F-D477BD316515}"/>
+          </ac:cxnSpMkLst>
+        </pc:cxnChg>
+        <pc:cxnChg chg="add mod">
+          <ac:chgData name="Josh Reiss" userId="71f87c30-4769-4a42-a082-a6a82298c8cb" providerId="ADAL" clId="{A0C6B147-1166-4B44-A00D-F3D77F199F8E}" dt="2026-03-11T16:37:23.573" v="254" actId="1036"/>
+          <ac:cxnSpMkLst>
+            <pc:docMk/>
+            <pc:sldMk cId="3176130722" sldId="362"/>
+            <ac:cxnSpMk id="26" creationId="{EAC9BD97-28B4-0B64-5022-61C07A503838}"/>
+          </ac:cxnSpMkLst>
+        </pc:cxnChg>
+        <pc:cxnChg chg="del mod">
+          <ac:chgData name="Josh Reiss" userId="71f87c30-4769-4a42-a082-a6a82298c8cb" providerId="ADAL" clId="{A0C6B147-1166-4B44-A00D-F3D77F199F8E}" dt="2026-03-11T16:43:52.355" v="293" actId="478"/>
+          <ac:cxnSpMkLst>
+            <pc:docMk/>
+            <pc:sldMk cId="3176130722" sldId="362"/>
+            <ac:cxnSpMk id="30" creationId="{F5D85A68-1897-CC45-3E7F-9B830179919A}"/>
+          </ac:cxnSpMkLst>
+        </pc:cxnChg>
+        <pc:cxnChg chg="add mod">
+          <ac:chgData name="Josh Reiss" userId="71f87c30-4769-4a42-a082-a6a82298c8cb" providerId="ADAL" clId="{A0C6B147-1166-4B44-A00D-F3D77F199F8E}" dt="2026-03-11T16:37:23.573" v="254" actId="1036"/>
+          <ac:cxnSpMkLst>
+            <pc:docMk/>
+            <pc:sldMk cId="3176130722" sldId="362"/>
+            <ac:cxnSpMk id="31" creationId="{D21602EB-024D-02F8-40EE-6BC4E78D5166}"/>
+          </ac:cxnSpMkLst>
+        </pc:cxnChg>
+        <pc:cxnChg chg="mod">
+          <ac:chgData name="Josh Reiss" userId="71f87c30-4769-4a42-a082-a6a82298c8cb" providerId="ADAL" clId="{A0C6B147-1166-4B44-A00D-F3D77F199F8E}" dt="2026-03-11T16:32:55.014" v="198" actId="14100"/>
+          <ac:cxnSpMkLst>
+            <pc:docMk/>
+            <pc:sldMk cId="3176130722" sldId="362"/>
+            <ac:cxnSpMk id="33" creationId="{EEB139E3-A8FD-E68A-9DDE-E16593B1D24B}"/>
+          </ac:cxnSpMkLst>
+        </pc:cxnChg>
+        <pc:cxnChg chg="add mod">
+          <ac:chgData name="Josh Reiss" userId="71f87c30-4769-4a42-a082-a6a82298c8cb" providerId="ADAL" clId="{A0C6B147-1166-4B44-A00D-F3D77F199F8E}" dt="2026-03-11T16:37:23.573" v="254" actId="1036"/>
+          <ac:cxnSpMkLst>
+            <pc:docMk/>
+            <pc:sldMk cId="3176130722" sldId="362"/>
+            <ac:cxnSpMk id="34" creationId="{ABF67D9D-04C6-28AB-2ED1-4FC49972C830}"/>
+          </ac:cxnSpMkLst>
+        </pc:cxnChg>
+        <pc:cxnChg chg="add del mod">
+          <ac:chgData name="Josh Reiss" userId="71f87c30-4769-4a42-a082-a6a82298c8cb" providerId="ADAL" clId="{A0C6B147-1166-4B44-A00D-F3D77F199F8E}" dt="2026-03-11T16:29:07.558" v="100" actId="478"/>
+          <ac:cxnSpMkLst>
+            <pc:docMk/>
+            <pc:sldMk cId="3176130722" sldId="362"/>
+            <ac:cxnSpMk id="38" creationId="{6E93F287-DFF6-8F7A-FD2D-4DD94609B7CE}"/>
+          </ac:cxnSpMkLst>
+        </pc:cxnChg>
+        <pc:cxnChg chg="add del mod">
+          <ac:chgData name="Josh Reiss" userId="71f87c30-4769-4a42-a082-a6a82298c8cb" providerId="ADAL" clId="{A0C6B147-1166-4B44-A00D-F3D77F199F8E}" dt="2026-03-11T16:30:04.373" v="139" actId="478"/>
+          <ac:cxnSpMkLst>
+            <pc:docMk/>
+            <pc:sldMk cId="3176130722" sldId="362"/>
+            <ac:cxnSpMk id="39" creationId="{F3C80B97-75F8-6D34-FC19-45F714476755}"/>
+          </ac:cxnSpMkLst>
+        </pc:cxnChg>
+        <pc:cxnChg chg="del mod">
+          <ac:chgData name="Josh Reiss" userId="71f87c30-4769-4a42-a082-a6a82298c8cb" providerId="ADAL" clId="{A0C6B147-1166-4B44-A00D-F3D77F199F8E}" dt="2026-03-11T16:30:04.373" v="139" actId="478"/>
+          <ac:cxnSpMkLst>
+            <pc:docMk/>
+            <pc:sldMk cId="3176130722" sldId="362"/>
+            <ac:cxnSpMk id="40" creationId="{518DAC87-C45C-01A2-289D-1D515087F2C9}"/>
+          </ac:cxnSpMkLst>
+        </pc:cxnChg>
+        <pc:cxnChg chg="add del mod">
+          <ac:chgData name="Josh Reiss" userId="71f87c30-4769-4a42-a082-a6a82298c8cb" providerId="ADAL" clId="{A0C6B147-1166-4B44-A00D-F3D77F199F8E}" dt="2026-03-11T16:30:04.373" v="139" actId="478"/>
+          <ac:cxnSpMkLst>
+            <pc:docMk/>
+            <pc:sldMk cId="3176130722" sldId="362"/>
+            <ac:cxnSpMk id="41" creationId="{94566F7C-3EB8-BE85-A43B-7181FEC71D55}"/>
+          </ac:cxnSpMkLst>
+        </pc:cxnChg>
+        <pc:cxnChg chg="add mod">
+          <ac:chgData name="Josh Reiss" userId="71f87c30-4769-4a42-a082-a6a82298c8cb" providerId="ADAL" clId="{A0C6B147-1166-4B44-A00D-F3D77F199F8E}" dt="2026-03-11T16:44:09.348" v="303" actId="1035"/>
+          <ac:cxnSpMkLst>
+            <pc:docMk/>
+            <pc:sldMk cId="3176130722" sldId="362"/>
+            <ac:cxnSpMk id="43" creationId="{8B6B6AE0-E2E5-7962-DCFC-4DC0491D80B3}"/>
+          </ac:cxnSpMkLst>
+        </pc:cxnChg>
+        <pc:cxnChg chg="mod">
+          <ac:chgData name="Josh Reiss" userId="71f87c30-4769-4a42-a082-a6a82298c8cb" providerId="ADAL" clId="{A0C6B147-1166-4B44-A00D-F3D77F199F8E}" dt="2026-03-11T16:44:09.348" v="303" actId="1035"/>
+          <ac:cxnSpMkLst>
+            <pc:docMk/>
+            <pc:sldMk cId="3176130722" sldId="362"/>
+            <ac:cxnSpMk id="45" creationId="{2639E5D2-0BFB-8459-75EC-5CE70A0AA8DB}"/>
+          </ac:cxnSpMkLst>
+        </pc:cxnChg>
+        <pc:cxnChg chg="add del mod">
+          <ac:chgData name="Josh Reiss" userId="71f87c30-4769-4a42-a082-a6a82298c8cb" providerId="ADAL" clId="{A0C6B147-1166-4B44-A00D-F3D77F199F8E}" dt="2026-03-11T16:30:04.373" v="139" actId="478"/>
+          <ac:cxnSpMkLst>
+            <pc:docMk/>
+            <pc:sldMk cId="3176130722" sldId="362"/>
+            <ac:cxnSpMk id="46" creationId="{337BED8F-EC71-C17D-287F-C41AE339227E}"/>
+          </ac:cxnSpMkLst>
+        </pc:cxnChg>
+        <pc:cxnChg chg="add mod">
+          <ac:chgData name="Josh Reiss" userId="71f87c30-4769-4a42-a082-a6a82298c8cb" providerId="ADAL" clId="{A0C6B147-1166-4B44-A00D-F3D77F199F8E}" dt="2026-03-11T16:44:04.607" v="295" actId="14100"/>
+          <ac:cxnSpMkLst>
+            <pc:docMk/>
+            <pc:sldMk cId="3176130722" sldId="362"/>
+            <ac:cxnSpMk id="63" creationId="{FA46E9D4-D0DB-778C-7EB3-B8F021EE7286}"/>
+          </ac:cxnSpMkLst>
+        </pc:cxnChg>
       </pc:sldChg>
     </pc:docChg>
   </pc:docChgLst>
@@ -413,7 +578,7 @@
           <a:p>
             <a:fld id="{D8E06A3B-885D-47A2-BBBF-3C17C577BFA5}" type="datetimeFigureOut">
               <a:rPr lang="en-GB" smtClean="0"/>
-              <a:t>26/08/2025</a:t>
+              <a:t>11/03/2026</a:t>
             </a:fld>
             <a:endParaRPr lang="en-GB"/>
           </a:p>
@@ -830,7 +995,7 @@
           <a:p>
             <a:fld id="{53F5E260-054C-4638-8D97-401FEF531A6C}" type="datetimeFigureOut">
               <a:rPr lang="en-GB" smtClean="0"/>
-              <a:t>26/08/2025</a:t>
+              <a:t>11/03/2026</a:t>
             </a:fld>
             <a:endParaRPr lang="en-GB"/>
           </a:p>
@@ -1030,7 +1195,7 @@
           <a:p>
             <a:fld id="{53F5E260-054C-4638-8D97-401FEF531A6C}" type="datetimeFigureOut">
               <a:rPr lang="en-GB" smtClean="0"/>
-              <a:t>26/08/2025</a:t>
+              <a:t>11/03/2026</a:t>
             </a:fld>
             <a:endParaRPr lang="en-GB"/>
           </a:p>
@@ -1240,7 +1405,7 @@
           <a:p>
             <a:fld id="{53F5E260-054C-4638-8D97-401FEF531A6C}" type="datetimeFigureOut">
               <a:rPr lang="en-GB" smtClean="0"/>
-              <a:t>26/08/2025</a:t>
+              <a:t>11/03/2026</a:t>
             </a:fld>
             <a:endParaRPr lang="en-GB"/>
           </a:p>
@@ -1440,7 +1605,7 @@
           <a:p>
             <a:fld id="{53F5E260-054C-4638-8D97-401FEF531A6C}" type="datetimeFigureOut">
               <a:rPr lang="en-GB" smtClean="0"/>
-              <a:t>26/08/2025</a:t>
+              <a:t>11/03/2026</a:t>
             </a:fld>
             <a:endParaRPr lang="en-GB"/>
           </a:p>
@@ -1716,7 +1881,7 @@
           <a:p>
             <a:fld id="{53F5E260-054C-4638-8D97-401FEF531A6C}" type="datetimeFigureOut">
               <a:rPr lang="en-GB" smtClean="0"/>
-              <a:t>26/08/2025</a:t>
+              <a:t>11/03/2026</a:t>
             </a:fld>
             <a:endParaRPr lang="en-GB"/>
           </a:p>
@@ -1984,7 +2149,7 @@
           <a:p>
             <a:fld id="{53F5E260-054C-4638-8D97-401FEF531A6C}" type="datetimeFigureOut">
               <a:rPr lang="en-GB" smtClean="0"/>
-              <a:t>26/08/2025</a:t>
+              <a:t>11/03/2026</a:t>
             </a:fld>
             <a:endParaRPr lang="en-GB"/>
           </a:p>
@@ -2399,7 +2564,7 @@
           <a:p>
             <a:fld id="{53F5E260-054C-4638-8D97-401FEF531A6C}" type="datetimeFigureOut">
               <a:rPr lang="en-GB" smtClean="0"/>
-              <a:t>26/08/2025</a:t>
+              <a:t>11/03/2026</a:t>
             </a:fld>
             <a:endParaRPr lang="en-GB"/>
           </a:p>
@@ -2541,7 +2706,7 @@
           <a:p>
             <a:fld id="{53F5E260-054C-4638-8D97-401FEF531A6C}" type="datetimeFigureOut">
               <a:rPr lang="en-GB" smtClean="0"/>
-              <a:t>26/08/2025</a:t>
+              <a:t>11/03/2026</a:t>
             </a:fld>
             <a:endParaRPr lang="en-GB"/>
           </a:p>
@@ -2654,7 +2819,7 @@
           <a:p>
             <a:fld id="{53F5E260-054C-4638-8D97-401FEF531A6C}" type="datetimeFigureOut">
               <a:rPr lang="en-GB" smtClean="0"/>
-              <a:t>26/08/2025</a:t>
+              <a:t>11/03/2026</a:t>
             </a:fld>
             <a:endParaRPr lang="en-GB"/>
           </a:p>
@@ -2967,7 +3132,7 @@
           <a:p>
             <a:fld id="{53F5E260-054C-4638-8D97-401FEF531A6C}" type="datetimeFigureOut">
               <a:rPr lang="en-GB" smtClean="0"/>
-              <a:t>26/08/2025</a:t>
+              <a:t>11/03/2026</a:t>
             </a:fld>
             <a:endParaRPr lang="en-GB"/>
           </a:p>
@@ -3256,7 +3421,7 @@
           <a:p>
             <a:fld id="{53F5E260-054C-4638-8D97-401FEF531A6C}" type="datetimeFigureOut">
               <a:rPr lang="en-GB" smtClean="0"/>
-              <a:t>26/08/2025</a:t>
+              <a:t>11/03/2026</a:t>
             </a:fld>
             <a:endParaRPr lang="en-GB"/>
           </a:p>
@@ -3499,7 +3664,7 @@
           <a:p>
             <a:fld id="{53F5E260-054C-4638-8D97-401FEF531A6C}" type="datetimeFigureOut">
               <a:rPr lang="en-GB" smtClean="0"/>
-              <a:t>26/08/2025</a:t>
+              <a:t>11/03/2026</a:t>
             </a:fld>
             <a:endParaRPr lang="en-GB"/>
           </a:p>
@@ -3947,35 +4112,10 @@
       </p:sp>
       <p:sp>
         <p:nvSpPr>
-          <p:cNvPr id="3" name="Content Placeholder 2">
-            <a:extLst>
-              <a:ext uri="{FF2B5EF4-FFF2-40B4-BE49-F238E27FC236}">
-                <a16:creationId xmlns:a16="http://schemas.microsoft.com/office/drawing/2014/main" id="{A9DC1AE9-8DA4-A0BD-B4EB-6D713DE8AD65}"/>
-              </a:ext>
-            </a:extLst>
-          </p:cNvPr>
-          <p:cNvSpPr>
-            <a:spLocks noGrp="1"/>
-          </p:cNvSpPr>
-          <p:nvPr>
-            <p:ph idx="1"/>
-          </p:nvPr>
-        </p:nvSpPr>
-        <p:spPr/>
-        <p:txBody>
-          <a:bodyPr/>
-          <a:lstStyle/>
-          <a:p>
-            <a:endParaRPr lang="en-GB" dirty="0"/>
-          </a:p>
-        </p:txBody>
-      </p:sp>
-      <p:sp>
-        <p:nvSpPr>
-          <p:cNvPr id="4" name="Rectangle 3">
-            <a:extLst>
-              <a:ext uri="{FF2B5EF4-FFF2-40B4-BE49-F238E27FC236}">
-                <a16:creationId xmlns:a16="http://schemas.microsoft.com/office/drawing/2014/main" id="{3F846BC9-EFB3-98C5-1EC0-AE9D268CBFC5}"/>
+          <p:cNvPr id="5" name="Rectangle 4">
+            <a:extLst>
+              <a:ext uri="{FF2B5EF4-FFF2-40B4-BE49-F238E27FC236}">
+                <a16:creationId xmlns:a16="http://schemas.microsoft.com/office/drawing/2014/main" id="{70C06A64-535C-81DB-DA43-A14F8BD51314}"/>
               </a:ext>
             </a:extLst>
           </p:cNvPr>
@@ -3984,8 +4124,8 @@
         </p:nvSpPr>
         <p:spPr>
           <a:xfrm>
-            <a:off x="2979413" y="3622521"/>
-            <a:ext cx="1122740" cy="648000"/>
+            <a:off x="3318976" y="3065054"/>
+            <a:ext cx="818875" cy="648000"/>
           </a:xfrm>
           <a:prstGeom prst="rect">
             <a:avLst/>
@@ -4017,17 +4157,17 @@
             <a:pPr algn="ctr"/>
             <a:r>
               <a:rPr lang="en-GB" dirty="0"/>
-              <a:t>Noise gain</a:t>
-            </a:r>
-          </a:p>
-        </p:txBody>
-      </p:sp>
-      <p:sp>
-        <p:nvSpPr>
-          <p:cNvPr id="6" name="Rectangle 5">
-            <a:extLst>
-              <a:ext uri="{FF2B5EF4-FFF2-40B4-BE49-F238E27FC236}">
-                <a16:creationId xmlns:a16="http://schemas.microsoft.com/office/drawing/2014/main" id="{D8A29253-740B-C0CC-7814-A95752B53C97}"/>
+              <a:t>Input</a:t>
+            </a:r>
+          </a:p>
+        </p:txBody>
+      </p:sp>
+      <p:sp>
+        <p:nvSpPr>
+          <p:cNvPr id="17" name="Rectangle 16">
+            <a:extLst>
+              <a:ext uri="{FF2B5EF4-FFF2-40B4-BE49-F238E27FC236}">
+                <a16:creationId xmlns:a16="http://schemas.microsoft.com/office/drawing/2014/main" id="{07A51429-21DD-6527-D786-A6BEF96EB071}"/>
               </a:ext>
             </a:extLst>
           </p:cNvPr>
@@ -4036,8 +4176,8 @@
         </p:nvSpPr>
         <p:spPr>
           <a:xfrm>
-            <a:off x="4417208" y="2393600"/>
-            <a:ext cx="1080000" cy="648000"/>
+            <a:off x="5295752" y="1899504"/>
+            <a:ext cx="1069359" cy="648000"/>
           </a:xfrm>
           <a:prstGeom prst="rect">
             <a:avLst/>
@@ -4068,19 +4208,25 @@
           <a:p>
             <a:pPr algn="ctr"/>
             <a:r>
-              <a:rPr lang="en-GB" dirty="0" err="1"/>
-              <a:t>Feedbackgain</a:t>
-            </a:r>
-            <a:endParaRPr lang="en-GB" dirty="0"/>
-          </a:p>
-        </p:txBody>
-      </p:sp>
-      <p:sp>
-        <p:nvSpPr>
-          <p:cNvPr id="7" name="Rectangle 6">
-            <a:extLst>
-              <a:ext uri="{FF2B5EF4-FFF2-40B4-BE49-F238E27FC236}">
-                <a16:creationId xmlns:a16="http://schemas.microsoft.com/office/drawing/2014/main" id="{433D80D1-16F4-FC89-CCA7-62588BC5C68F}"/>
+              <a:rPr lang="en-GB" dirty="0"/>
+              <a:t>Feedback</a:t>
+            </a:r>
+          </a:p>
+          <a:p>
+            <a:pPr algn="ctr"/>
+            <a:r>
+              <a:rPr lang="en-GB" dirty="0"/>
+              <a:t>gain</a:t>
+            </a:r>
+          </a:p>
+        </p:txBody>
+      </p:sp>
+      <p:sp>
+        <p:nvSpPr>
+          <p:cNvPr id="18" name="Rectangle 17">
+            <a:extLst>
+              <a:ext uri="{FF2B5EF4-FFF2-40B4-BE49-F238E27FC236}">
+                <a16:creationId xmlns:a16="http://schemas.microsoft.com/office/drawing/2014/main" id="{8F98C744-E435-8A88-D120-E83A2AB68262}"/>
               </a:ext>
             </a:extLst>
           </p:cNvPr>
@@ -4089,8 +4235,8 @@
         </p:nvSpPr>
         <p:spPr>
           <a:xfrm>
-            <a:off x="7464275" y="3622521"/>
-            <a:ext cx="1296000" cy="648000"/>
+            <a:off x="7912958" y="3065054"/>
+            <a:ext cx="972655" cy="648000"/>
           </a:xfrm>
           <a:prstGeom prst="rect">
             <a:avLst/>
@@ -4129,24 +4275,24 @@
       </p:sp>
       <p:cxnSp>
         <p:nvCxnSpPr>
-          <p:cNvPr id="8" name="Straight Arrow Connector 7">
-            <a:extLst>
-              <a:ext uri="{FF2B5EF4-FFF2-40B4-BE49-F238E27FC236}">
-                <a16:creationId xmlns:a16="http://schemas.microsoft.com/office/drawing/2014/main" id="{2F6EE011-B9CC-0173-0233-D54C431D3434}"/>
+          <p:cNvPr id="19" name="Straight Arrow Connector 18">
+            <a:extLst>
+              <a:ext uri="{FF2B5EF4-FFF2-40B4-BE49-F238E27FC236}">
+                <a16:creationId xmlns:a16="http://schemas.microsoft.com/office/drawing/2014/main" id="{A8881661-0E5C-F923-1D2B-ED8A416807BD}"/>
               </a:ext>
             </a:extLst>
           </p:cNvPr>
           <p:cNvCxnSpPr>
             <a:cxnSpLocks/>
-            <a:stCxn id="4" idx="3"/>
-            <a:endCxn id="12" idx="2"/>
+            <a:stCxn id="5" idx="3"/>
+            <a:endCxn id="27" idx="2"/>
           </p:cNvCxnSpPr>
           <p:nvPr/>
         </p:nvCxnSpPr>
         <p:spPr>
           <a:xfrm>
-            <a:off x="4102153" y="3946521"/>
-            <a:ext cx="576203" cy="0"/>
+            <a:off x="4137851" y="3389054"/>
+            <a:ext cx="519688" cy="0"/>
           </a:xfrm>
           <a:prstGeom prst="straightConnector1">
             <a:avLst/>
@@ -4175,24 +4321,23 @@
       </p:cxnSp>
       <p:cxnSp>
         <p:nvCxnSpPr>
-          <p:cNvPr id="9" name="Straight Arrow Connector 8">
-            <a:extLst>
-              <a:ext uri="{FF2B5EF4-FFF2-40B4-BE49-F238E27FC236}">
-                <a16:creationId xmlns:a16="http://schemas.microsoft.com/office/drawing/2014/main" id="{FFC36A61-7079-C397-7022-FA7FDD56CA6E}"/>
+          <p:cNvPr id="24" name="Straight Arrow Connector 23">
+            <a:extLst>
+              <a:ext uri="{FF2B5EF4-FFF2-40B4-BE49-F238E27FC236}">
+                <a16:creationId xmlns:a16="http://schemas.microsoft.com/office/drawing/2014/main" id="{8FCDFAD5-0D34-E4F5-4E38-E7D4F458DF60}"/>
               </a:ext>
             </a:extLst>
           </p:cNvPr>
           <p:cNvCxnSpPr>
             <a:cxnSpLocks/>
-            <a:stCxn id="16" idx="1"/>
-            <a:endCxn id="6" idx="3"/>
+            <a:endCxn id="17" idx="3"/>
           </p:cNvCxnSpPr>
           <p:nvPr/>
         </p:nvCxnSpPr>
         <p:spPr>
           <a:xfrm flipH="1">
-            <a:off x="5497208" y="2717600"/>
-            <a:ext cx="669293" cy="0"/>
+            <a:off x="6365111" y="2223504"/>
+            <a:ext cx="486547" cy="0"/>
           </a:xfrm>
           <a:prstGeom prst="straightConnector1">
             <a:avLst/>
@@ -4221,23 +4366,269 @@
       </p:cxnSp>
       <p:cxnSp>
         <p:nvCxnSpPr>
-          <p:cNvPr id="10" name="Straight Arrow Connector 9">
-            <a:extLst>
-              <a:ext uri="{FF2B5EF4-FFF2-40B4-BE49-F238E27FC236}">
-                <a16:creationId xmlns:a16="http://schemas.microsoft.com/office/drawing/2014/main" id="{BD85C650-5466-D425-6E33-6824E7A3F418}"/>
+          <p:cNvPr id="25" name="Straight Arrow Connector 24">
+            <a:extLst>
+              <a:ext uri="{FF2B5EF4-FFF2-40B4-BE49-F238E27FC236}">
+                <a16:creationId xmlns:a16="http://schemas.microsoft.com/office/drawing/2014/main" id="{C94A2F26-51F0-59EA-099F-D477BD316515}"/>
               </a:ext>
             </a:extLst>
           </p:cNvPr>
           <p:cNvCxnSpPr>
             <a:cxnSpLocks/>
-            <a:endCxn id="16" idx="2"/>
+            <a:stCxn id="32" idx="0"/>
           </p:cNvCxnSpPr>
           <p:nvPr/>
         </p:nvCxnSpPr>
         <p:spPr>
           <a:xfrm flipV="1">
-            <a:off x="6613953" y="3041600"/>
-            <a:ext cx="0" cy="904919"/>
+            <a:off x="6851658" y="2214213"/>
+            <a:ext cx="1" cy="850761"/>
+          </a:xfrm>
+          <a:prstGeom prst="straightConnector1">
+            <a:avLst/>
+          </a:prstGeom>
+          <a:ln w="31750">
+            <a:solidFill>
+              <a:schemeClr val="tx1"/>
+            </a:solidFill>
+            <a:tailEnd type="none" w="lg" len="lg"/>
+          </a:ln>
+        </p:spPr>
+        <p:style>
+          <a:lnRef idx="1">
+            <a:schemeClr val="accent1"/>
+          </a:lnRef>
+          <a:fillRef idx="0">
+            <a:schemeClr val="accent1"/>
+          </a:fillRef>
+          <a:effectRef idx="0">
+            <a:schemeClr val="accent1"/>
+          </a:effectRef>
+          <a:fontRef idx="minor">
+            <a:schemeClr val="tx1"/>
+          </a:fontRef>
+        </p:style>
+      </p:cxnSp>
+      <p:cxnSp>
+        <p:nvCxnSpPr>
+          <p:cNvPr id="26" name="Straight Arrow Connector 25">
+            <a:extLst>
+              <a:ext uri="{FF2B5EF4-FFF2-40B4-BE49-F238E27FC236}">
+                <a16:creationId xmlns:a16="http://schemas.microsoft.com/office/drawing/2014/main" id="{EAC9BD97-28B4-0B64-5022-61C07A503838}"/>
+              </a:ext>
+            </a:extLst>
+          </p:cNvPr>
+          <p:cNvCxnSpPr>
+            <a:cxnSpLocks/>
+            <a:endCxn id="27" idx="0"/>
+          </p:cNvCxnSpPr>
+          <p:nvPr/>
+        </p:nvCxnSpPr>
+        <p:spPr>
+          <a:xfrm>
+            <a:off x="4927539" y="2214213"/>
+            <a:ext cx="0" cy="904841"/>
+          </a:xfrm>
+          <a:prstGeom prst="straightConnector1">
+            <a:avLst/>
+          </a:prstGeom>
+          <a:ln w="31750">
+            <a:solidFill>
+              <a:schemeClr val="tx1"/>
+            </a:solidFill>
+            <a:tailEnd type="arrow" w="lg" len="lg"/>
+          </a:ln>
+        </p:spPr>
+        <p:style>
+          <a:lnRef idx="1">
+            <a:schemeClr val="accent1"/>
+          </a:lnRef>
+          <a:fillRef idx="0">
+            <a:schemeClr val="accent1"/>
+          </a:fillRef>
+          <a:effectRef idx="0">
+            <a:schemeClr val="accent1"/>
+          </a:effectRef>
+          <a:fontRef idx="minor">
+            <a:schemeClr val="tx1"/>
+          </a:fontRef>
+        </p:style>
+      </p:cxnSp>
+      <p:sp>
+        <p:nvSpPr>
+          <p:cNvPr id="27" name="Oval 26">
+            <a:extLst>
+              <a:ext uri="{FF2B5EF4-FFF2-40B4-BE49-F238E27FC236}">
+                <a16:creationId xmlns:a16="http://schemas.microsoft.com/office/drawing/2014/main" id="{8F04EF52-523D-08EA-E57F-EE00EAF097DB}"/>
+              </a:ext>
+            </a:extLst>
+          </p:cNvPr>
+          <p:cNvSpPr/>
+          <p:nvPr/>
+        </p:nvSpPr>
+        <p:spPr>
+          <a:xfrm>
+            <a:off x="4657539" y="3119054"/>
+            <a:ext cx="540000" cy="540000"/>
+          </a:xfrm>
+          <a:prstGeom prst="ellipse">
+            <a:avLst/>
+          </a:prstGeom>
+          <a:solidFill>
+            <a:srgbClr val="7030A0"/>
+          </a:solidFill>
+          <a:ln w="31750"/>
+        </p:spPr>
+        <p:style>
+          <a:lnRef idx="2">
+            <a:schemeClr val="accent1">
+              <a:shade val="50000"/>
+            </a:schemeClr>
+          </a:lnRef>
+          <a:fillRef idx="1">
+            <a:schemeClr val="accent1"/>
+          </a:fillRef>
+          <a:effectRef idx="0">
+            <a:schemeClr val="accent1"/>
+          </a:effectRef>
+          <a:fontRef idx="minor">
+            <a:schemeClr val="lt1"/>
+          </a:fontRef>
+        </p:style>
+        <p:txBody>
+          <a:bodyPr rtlCol="0" anchor="ctr"/>
+          <a:lstStyle/>
+          <a:p>
+            <a:pPr algn="ctr"/>
+            <a:r>
+              <a:rPr lang="en-GB" sz="3600" dirty="0">
+                <a:solidFill>
+                  <a:schemeClr val="bg1"/>
+                </a:solidFill>
+              </a:rPr>
+              <a:t>+</a:t>
+            </a:r>
+          </a:p>
+        </p:txBody>
+      </p:sp>
+      <p:cxnSp>
+        <p:nvCxnSpPr>
+          <p:cNvPr id="31" name="Straight Arrow Connector 30">
+            <a:extLst>
+              <a:ext uri="{FF2B5EF4-FFF2-40B4-BE49-F238E27FC236}">
+                <a16:creationId xmlns:a16="http://schemas.microsoft.com/office/drawing/2014/main" id="{D21602EB-024D-02F8-40EE-6BC4E78D5166}"/>
+              </a:ext>
+            </a:extLst>
+          </p:cNvPr>
+          <p:cNvCxnSpPr>
+            <a:cxnSpLocks/>
+            <a:stCxn id="27" idx="6"/>
+            <a:endCxn id="32" idx="1"/>
+          </p:cNvCxnSpPr>
+          <p:nvPr/>
+        </p:nvCxnSpPr>
+        <p:spPr>
+          <a:xfrm flipV="1">
+            <a:off x="5197539" y="3388974"/>
+            <a:ext cx="1241315" cy="80"/>
+          </a:xfrm>
+          <a:prstGeom prst="straightConnector1">
+            <a:avLst/>
+          </a:prstGeom>
+          <a:ln w="31750">
+            <a:solidFill>
+              <a:schemeClr val="tx1"/>
+            </a:solidFill>
+            <a:tailEnd type="arrow" w="lg" len="lg"/>
+          </a:ln>
+        </p:spPr>
+        <p:style>
+          <a:lnRef idx="1">
+            <a:schemeClr val="accent1"/>
+          </a:lnRef>
+          <a:fillRef idx="0">
+            <a:schemeClr val="accent1"/>
+          </a:fillRef>
+          <a:effectRef idx="0">
+            <a:schemeClr val="accent1"/>
+          </a:effectRef>
+          <a:fontRef idx="minor">
+            <a:schemeClr val="tx1"/>
+          </a:fontRef>
+        </p:style>
+      </p:cxnSp>
+      <p:sp>
+        <p:nvSpPr>
+          <p:cNvPr id="32" name="Rectangle 31">
+            <a:extLst>
+              <a:ext uri="{FF2B5EF4-FFF2-40B4-BE49-F238E27FC236}">
+                <a16:creationId xmlns:a16="http://schemas.microsoft.com/office/drawing/2014/main" id="{6D2F7852-878B-19B4-8961-B4D5DC69C117}"/>
+              </a:ext>
+            </a:extLst>
+          </p:cNvPr>
+          <p:cNvSpPr/>
+          <p:nvPr/>
+        </p:nvSpPr>
+        <p:spPr>
+          <a:xfrm>
+            <a:off x="6438854" y="3064974"/>
+            <a:ext cx="825608" cy="648000"/>
+          </a:xfrm>
+          <a:prstGeom prst="rect">
+            <a:avLst/>
+          </a:prstGeom>
+          <a:solidFill>
+            <a:srgbClr val="7030A0"/>
+          </a:solidFill>
+        </p:spPr>
+        <p:style>
+          <a:lnRef idx="2">
+            <a:schemeClr val="accent1">
+              <a:shade val="50000"/>
+            </a:schemeClr>
+          </a:lnRef>
+          <a:fillRef idx="1">
+            <a:schemeClr val="accent1"/>
+          </a:fillRef>
+          <a:effectRef idx="0">
+            <a:schemeClr val="accent1"/>
+          </a:effectRef>
+          <a:fontRef idx="minor">
+            <a:schemeClr val="lt1"/>
+          </a:fontRef>
+        </p:style>
+        <p:txBody>
+          <a:bodyPr rtlCol="0" anchor="ctr"/>
+          <a:lstStyle/>
+          <a:p>
+            <a:pPr algn="ctr"/>
+            <a:r>
+              <a:rPr lang="en-GB" dirty="0"/>
+              <a:t>Delay</a:t>
+            </a:r>
+          </a:p>
+        </p:txBody>
+      </p:sp>
+      <p:cxnSp>
+        <p:nvCxnSpPr>
+          <p:cNvPr id="33" name="Straight Arrow Connector 32">
+            <a:extLst>
+              <a:ext uri="{FF2B5EF4-FFF2-40B4-BE49-F238E27FC236}">
+                <a16:creationId xmlns:a16="http://schemas.microsoft.com/office/drawing/2014/main" id="{EEB139E3-A8FD-E68A-9DDE-E16593B1D24B}"/>
+              </a:ext>
+            </a:extLst>
+          </p:cNvPr>
+          <p:cNvCxnSpPr>
+            <a:cxnSpLocks/>
+            <a:stCxn id="32" idx="3"/>
+            <a:endCxn id="18" idx="1"/>
+          </p:cNvCxnSpPr>
+          <p:nvPr/>
+        </p:nvCxnSpPr>
+        <p:spPr>
+          <a:xfrm>
+            <a:off x="7264462" y="3388974"/>
+            <a:ext cx="648496" cy="80"/>
           </a:xfrm>
           <a:prstGeom prst="straightConnector1">
             <a:avLst/>
@@ -4266,24 +4657,173 @@
       </p:cxnSp>
       <p:cxnSp>
         <p:nvCxnSpPr>
-          <p:cNvPr id="11" name="Straight Arrow Connector 10">
-            <a:extLst>
-              <a:ext uri="{FF2B5EF4-FFF2-40B4-BE49-F238E27FC236}">
-                <a16:creationId xmlns:a16="http://schemas.microsoft.com/office/drawing/2014/main" id="{5E4D74EE-2E17-24D1-6C1E-6657C11EC8D6}"/>
+          <p:cNvPr id="34" name="Straight Arrow Connector 33">
+            <a:extLst>
+              <a:ext uri="{FF2B5EF4-FFF2-40B4-BE49-F238E27FC236}">
+                <a16:creationId xmlns:a16="http://schemas.microsoft.com/office/drawing/2014/main" id="{ABF67D9D-04C6-28AB-2ED1-4FC49972C830}"/>
               </a:ext>
             </a:extLst>
           </p:cNvPr>
           <p:cNvCxnSpPr>
             <a:cxnSpLocks/>
-            <a:stCxn id="6" idx="2"/>
-            <a:endCxn id="12" idx="0"/>
+            <a:stCxn id="17" idx="1"/>
           </p:cNvCxnSpPr>
           <p:nvPr/>
         </p:nvCxnSpPr>
         <p:spPr>
           <a:xfrm flipH="1">
-            <a:off x="4948356" y="3041600"/>
-            <a:ext cx="8852" cy="634921"/>
+            <a:off x="4907756" y="2223504"/>
+            <a:ext cx="387996" cy="0"/>
+          </a:xfrm>
+          <a:prstGeom prst="straightConnector1">
+            <a:avLst/>
+          </a:prstGeom>
+          <a:ln w="31750">
+            <a:solidFill>
+              <a:schemeClr val="tx1"/>
+            </a:solidFill>
+            <a:tailEnd type="none" w="lg" len="lg"/>
+          </a:ln>
+        </p:spPr>
+        <p:style>
+          <a:lnRef idx="1">
+            <a:schemeClr val="accent1"/>
+          </a:lnRef>
+          <a:fillRef idx="0">
+            <a:schemeClr val="accent1"/>
+          </a:fillRef>
+          <a:effectRef idx="0">
+            <a:schemeClr val="accent1"/>
+          </a:effectRef>
+          <a:fontRef idx="minor">
+            <a:schemeClr val="tx1"/>
+          </a:fontRef>
+        </p:style>
+      </p:cxnSp>
+      <p:sp>
+        <p:nvSpPr>
+          <p:cNvPr id="35" name="Rectangle 34">
+            <a:extLst>
+              <a:ext uri="{FF2B5EF4-FFF2-40B4-BE49-F238E27FC236}">
+                <a16:creationId xmlns:a16="http://schemas.microsoft.com/office/drawing/2014/main" id="{2EF6D3CA-5FF5-D495-5D1C-8E347075C9CB}"/>
+              </a:ext>
+            </a:extLst>
+          </p:cNvPr>
+          <p:cNvSpPr/>
+          <p:nvPr/>
+        </p:nvSpPr>
+        <p:spPr>
+          <a:xfrm>
+            <a:off x="3318976" y="4814757"/>
+            <a:ext cx="818875" cy="648000"/>
+          </a:xfrm>
+          <a:prstGeom prst="rect">
+            <a:avLst/>
+          </a:prstGeom>
+          <a:solidFill>
+            <a:srgbClr val="7030A0"/>
+          </a:solidFill>
+        </p:spPr>
+        <p:style>
+          <a:lnRef idx="2">
+            <a:schemeClr val="accent1">
+              <a:shade val="50000"/>
+            </a:schemeClr>
+          </a:lnRef>
+          <a:fillRef idx="1">
+            <a:schemeClr val="accent1"/>
+          </a:fillRef>
+          <a:effectRef idx="0">
+            <a:schemeClr val="accent1"/>
+          </a:effectRef>
+          <a:fontRef idx="minor">
+            <a:schemeClr val="lt1"/>
+          </a:fontRef>
+        </p:style>
+        <p:txBody>
+          <a:bodyPr rtlCol="0" anchor="ctr"/>
+          <a:lstStyle/>
+          <a:p>
+            <a:pPr algn="ctr"/>
+            <a:r>
+              <a:rPr lang="en-GB" dirty="0"/>
+              <a:t>Input</a:t>
+            </a:r>
+          </a:p>
+        </p:txBody>
+      </p:sp>
+      <p:sp>
+        <p:nvSpPr>
+          <p:cNvPr id="37" name="Rectangle 36">
+            <a:extLst>
+              <a:ext uri="{FF2B5EF4-FFF2-40B4-BE49-F238E27FC236}">
+                <a16:creationId xmlns:a16="http://schemas.microsoft.com/office/drawing/2014/main" id="{5F7E456B-CB93-A977-19F9-11D9EDA80D6F}"/>
+              </a:ext>
+            </a:extLst>
+          </p:cNvPr>
+          <p:cNvSpPr/>
+          <p:nvPr/>
+        </p:nvSpPr>
+        <p:spPr>
+          <a:xfrm>
+            <a:off x="7912958" y="4814757"/>
+            <a:ext cx="972655" cy="648000"/>
+          </a:xfrm>
+          <a:prstGeom prst="rect">
+            <a:avLst/>
+          </a:prstGeom>
+          <a:solidFill>
+            <a:srgbClr val="7030A0"/>
+          </a:solidFill>
+        </p:spPr>
+        <p:style>
+          <a:lnRef idx="2">
+            <a:schemeClr val="accent1">
+              <a:shade val="50000"/>
+            </a:schemeClr>
+          </a:lnRef>
+          <a:fillRef idx="1">
+            <a:schemeClr val="accent1"/>
+          </a:fillRef>
+          <a:effectRef idx="0">
+            <a:schemeClr val="accent1"/>
+          </a:effectRef>
+          <a:fontRef idx="minor">
+            <a:schemeClr val="lt1"/>
+          </a:fontRef>
+        </p:style>
+        <p:txBody>
+          <a:bodyPr rtlCol="0" anchor="ctr"/>
+          <a:lstStyle/>
+          <a:p>
+            <a:pPr algn="ctr"/>
+            <a:r>
+              <a:rPr lang="en-GB" dirty="0"/>
+              <a:t>Output</a:t>
+            </a:r>
+          </a:p>
+        </p:txBody>
+      </p:sp>
+      <p:cxnSp>
+        <p:nvCxnSpPr>
+          <p:cNvPr id="43" name="Straight Arrow Connector 42">
+            <a:extLst>
+              <a:ext uri="{FF2B5EF4-FFF2-40B4-BE49-F238E27FC236}">
+                <a16:creationId xmlns:a16="http://schemas.microsoft.com/office/drawing/2014/main" id="{8B6B6AE0-E2E5-7962-DCFC-4DC0491D80B3}"/>
+              </a:ext>
+            </a:extLst>
+          </p:cNvPr>
+          <p:cNvCxnSpPr>
+            <a:cxnSpLocks/>
+            <a:stCxn id="35" idx="3"/>
+            <a:endCxn id="44" idx="1"/>
+          </p:cNvCxnSpPr>
+          <p:nvPr/>
+        </p:nvCxnSpPr>
+        <p:spPr>
+          <a:xfrm flipV="1">
+            <a:off x="4137851" y="5138677"/>
+            <a:ext cx="1272927" cy="80"/>
           </a:xfrm>
           <a:prstGeom prst="straightConnector1">
             <a:avLst/>
@@ -4312,10 +4852,10 @@
       </p:cxnSp>
       <p:sp>
         <p:nvSpPr>
-          <p:cNvPr id="12" name="Oval 11">
-            <a:extLst>
-              <a:ext uri="{FF2B5EF4-FFF2-40B4-BE49-F238E27FC236}">
-                <a16:creationId xmlns:a16="http://schemas.microsoft.com/office/drawing/2014/main" id="{52F90E31-3D83-AAB9-76EC-A3A3A0DC8D66}"/>
+          <p:cNvPr id="44" name="Rectangle 43">
+            <a:extLst>
+              <a:ext uri="{FF2B5EF4-FFF2-40B4-BE49-F238E27FC236}">
+                <a16:creationId xmlns:a16="http://schemas.microsoft.com/office/drawing/2014/main" id="{5773FF25-9EB6-3A51-CED1-AF63D85A4777}"/>
               </a:ext>
             </a:extLst>
           </p:cNvPr>
@@ -4324,313 +4864,8 @@
         </p:nvSpPr>
         <p:spPr>
           <a:xfrm>
-            <a:off x="4678356" y="3676521"/>
-            <a:ext cx="540000" cy="540000"/>
-          </a:xfrm>
-          <a:prstGeom prst="ellipse">
-            <a:avLst/>
-          </a:prstGeom>
-          <a:solidFill>
-            <a:srgbClr val="7030A0"/>
-          </a:solidFill>
-          <a:ln w="31750"/>
-        </p:spPr>
-        <p:style>
-          <a:lnRef idx="2">
-            <a:schemeClr val="accent1">
-              <a:shade val="50000"/>
-            </a:schemeClr>
-          </a:lnRef>
-          <a:fillRef idx="1">
-            <a:schemeClr val="accent1"/>
-          </a:fillRef>
-          <a:effectRef idx="0">
-            <a:schemeClr val="accent1"/>
-          </a:effectRef>
-          <a:fontRef idx="minor">
-            <a:schemeClr val="lt1"/>
-          </a:fontRef>
-        </p:style>
-        <p:txBody>
-          <a:bodyPr rtlCol="0" anchor="ctr"/>
-          <a:lstStyle/>
-          <a:p>
-            <a:pPr algn="ctr"/>
-            <a:r>
-              <a:rPr lang="en-GB" sz="3600" dirty="0">
-                <a:solidFill>
-                  <a:schemeClr val="bg1"/>
-                </a:solidFill>
-              </a:rPr>
-              <a:t>+</a:t>
-            </a:r>
-          </a:p>
-        </p:txBody>
-      </p:sp>
-      <p:cxnSp>
-        <p:nvCxnSpPr>
-          <p:cNvPr id="13" name="Straight Arrow Connector 12">
-            <a:extLst>
-              <a:ext uri="{FF2B5EF4-FFF2-40B4-BE49-F238E27FC236}">
-                <a16:creationId xmlns:a16="http://schemas.microsoft.com/office/drawing/2014/main" id="{6456C4B5-9423-DB9C-C80B-1725F63772E3}"/>
-              </a:ext>
-            </a:extLst>
-          </p:cNvPr>
-          <p:cNvCxnSpPr>
-            <a:cxnSpLocks/>
-            <a:stCxn id="12" idx="6"/>
-            <a:endCxn id="7" idx="1"/>
-          </p:cNvCxnSpPr>
-          <p:nvPr/>
-        </p:nvCxnSpPr>
-        <p:spPr>
-          <a:xfrm>
-            <a:off x="5218356" y="3946521"/>
-            <a:ext cx="2245919" cy="0"/>
-          </a:xfrm>
-          <a:prstGeom prst="straightConnector1">
-            <a:avLst/>
-          </a:prstGeom>
-          <a:ln w="31750">
-            <a:solidFill>
-              <a:schemeClr val="tx1"/>
-            </a:solidFill>
-            <a:tailEnd type="arrow" w="lg" len="lg"/>
-          </a:ln>
-        </p:spPr>
-        <p:style>
-          <a:lnRef idx="1">
-            <a:schemeClr val="accent1"/>
-          </a:lnRef>
-          <a:fillRef idx="0">
-            <a:schemeClr val="accent1"/>
-          </a:fillRef>
-          <a:effectRef idx="0">
-            <a:schemeClr val="accent1"/>
-          </a:effectRef>
-          <a:fontRef idx="minor">
-            <a:schemeClr val="tx1"/>
-          </a:fontRef>
-        </p:style>
-      </p:cxnSp>
-      <p:sp>
-        <p:nvSpPr>
-          <p:cNvPr id="14" name="Rectangle 13">
-            <a:extLst>
-              <a:ext uri="{FF2B5EF4-FFF2-40B4-BE49-F238E27FC236}">
-                <a16:creationId xmlns:a16="http://schemas.microsoft.com/office/drawing/2014/main" id="{0C7ADD34-2607-0525-4CE5-8D48E3FF3A6E}"/>
-              </a:ext>
-            </a:extLst>
-          </p:cNvPr>
-          <p:cNvSpPr/>
-          <p:nvPr/>
-        </p:nvSpPr>
-        <p:spPr>
-          <a:xfrm>
-            <a:off x="1215350" y="3622521"/>
-            <a:ext cx="1122740" cy="648000"/>
-          </a:xfrm>
-          <a:prstGeom prst="rect">
-            <a:avLst/>
-          </a:prstGeom>
-          <a:solidFill>
-            <a:srgbClr val="7030A0"/>
-          </a:solidFill>
-        </p:spPr>
-        <p:style>
-          <a:lnRef idx="2">
-            <a:schemeClr val="accent1">
-              <a:shade val="50000"/>
-            </a:schemeClr>
-          </a:lnRef>
-          <a:fillRef idx="1">
-            <a:schemeClr val="accent1"/>
-          </a:fillRef>
-          <a:effectRef idx="0">
-            <a:schemeClr val="accent1"/>
-          </a:effectRef>
-          <a:fontRef idx="minor">
-            <a:schemeClr val="lt1"/>
-          </a:fontRef>
-        </p:style>
-        <p:txBody>
-          <a:bodyPr rtlCol="0" anchor="ctr"/>
-          <a:lstStyle/>
-          <a:p>
-            <a:pPr algn="ctr"/>
-            <a:r>
-              <a:rPr lang="en-GB" dirty="0"/>
-              <a:t>Noise</a:t>
-            </a:r>
-          </a:p>
-        </p:txBody>
-      </p:sp>
-      <p:cxnSp>
-        <p:nvCxnSpPr>
-          <p:cNvPr id="15" name="Straight Arrow Connector 14">
-            <a:extLst>
-              <a:ext uri="{FF2B5EF4-FFF2-40B4-BE49-F238E27FC236}">
-                <a16:creationId xmlns:a16="http://schemas.microsoft.com/office/drawing/2014/main" id="{463F40BF-487C-70FE-4BB1-6A7705371D21}"/>
-              </a:ext>
-            </a:extLst>
-          </p:cNvPr>
-          <p:cNvCxnSpPr>
-            <a:cxnSpLocks/>
-            <a:stCxn id="14" idx="3"/>
-            <a:endCxn id="4" idx="1"/>
-          </p:cNvCxnSpPr>
-          <p:nvPr/>
-        </p:nvCxnSpPr>
-        <p:spPr>
-          <a:xfrm>
-            <a:off x="2338090" y="3946521"/>
-            <a:ext cx="641323" cy="0"/>
-          </a:xfrm>
-          <a:prstGeom prst="straightConnector1">
-            <a:avLst/>
-          </a:prstGeom>
-          <a:ln w="31750">
-            <a:solidFill>
-              <a:schemeClr val="tx1"/>
-            </a:solidFill>
-            <a:tailEnd type="arrow" w="lg" len="lg"/>
-          </a:ln>
-        </p:spPr>
-        <p:style>
-          <a:lnRef idx="1">
-            <a:schemeClr val="accent1"/>
-          </a:lnRef>
-          <a:fillRef idx="0">
-            <a:schemeClr val="accent1"/>
-          </a:fillRef>
-          <a:effectRef idx="0">
-            <a:schemeClr val="accent1"/>
-          </a:effectRef>
-          <a:fontRef idx="minor">
-            <a:schemeClr val="tx1"/>
-          </a:fontRef>
-        </p:style>
-      </p:cxnSp>
-      <p:sp>
-        <p:nvSpPr>
-          <p:cNvPr id="16" name="Rectangle 15">
-            <a:extLst>
-              <a:ext uri="{FF2B5EF4-FFF2-40B4-BE49-F238E27FC236}">
-                <a16:creationId xmlns:a16="http://schemas.microsoft.com/office/drawing/2014/main" id="{7A014B07-D770-F62D-52B0-0A233060167C}"/>
-              </a:ext>
-            </a:extLst>
-          </p:cNvPr>
-          <p:cNvSpPr/>
-          <p:nvPr/>
-        </p:nvSpPr>
-        <p:spPr>
-          <a:xfrm>
-            <a:off x="6166501" y="2393600"/>
-            <a:ext cx="894904" cy="648000"/>
-          </a:xfrm>
-          <a:prstGeom prst="rect">
-            <a:avLst/>
-          </a:prstGeom>
-          <a:solidFill>
-            <a:srgbClr val="7030A0"/>
-          </a:solidFill>
-        </p:spPr>
-        <p:style>
-          <a:lnRef idx="2">
-            <a:schemeClr val="accent1">
-              <a:shade val="50000"/>
-            </a:schemeClr>
-          </a:lnRef>
-          <a:fillRef idx="1">
-            <a:schemeClr val="accent1"/>
-          </a:fillRef>
-          <a:effectRef idx="0">
-            <a:schemeClr val="accent1"/>
-          </a:effectRef>
-          <a:fontRef idx="minor">
-            <a:schemeClr val="lt1"/>
-          </a:fontRef>
-        </p:style>
-        <p:txBody>
-          <a:bodyPr rtlCol="0" anchor="ctr"/>
-          <a:lstStyle/>
-          <a:p>
-            <a:pPr algn="ctr"/>
-            <a:r>
-              <a:rPr lang="en-GB" dirty="0"/>
-              <a:t>Delay</a:t>
-            </a:r>
-          </a:p>
-        </p:txBody>
-      </p:sp>
-      <p:sp>
-        <p:nvSpPr>
-          <p:cNvPr id="20" name="Rectangle 19">
-            <a:extLst>
-              <a:ext uri="{FF2B5EF4-FFF2-40B4-BE49-F238E27FC236}">
-                <a16:creationId xmlns:a16="http://schemas.microsoft.com/office/drawing/2014/main" id="{C81B9FC7-1020-C2CA-6424-B66FD5C36364}"/>
-              </a:ext>
-            </a:extLst>
-          </p:cNvPr>
-          <p:cNvSpPr/>
-          <p:nvPr/>
-        </p:nvSpPr>
-        <p:spPr>
-          <a:xfrm>
-            <a:off x="2979413" y="5266540"/>
-            <a:ext cx="1122740" cy="648000"/>
-          </a:xfrm>
-          <a:prstGeom prst="rect">
-            <a:avLst/>
-          </a:prstGeom>
-          <a:solidFill>
-            <a:srgbClr val="7030A0"/>
-          </a:solidFill>
-        </p:spPr>
-        <p:style>
-          <a:lnRef idx="2">
-            <a:schemeClr val="accent1">
-              <a:shade val="50000"/>
-            </a:schemeClr>
-          </a:lnRef>
-          <a:fillRef idx="1">
-            <a:schemeClr val="accent1"/>
-          </a:fillRef>
-          <a:effectRef idx="0">
-            <a:schemeClr val="accent1"/>
-          </a:effectRef>
-          <a:fontRef idx="minor">
-            <a:schemeClr val="lt1"/>
-          </a:fontRef>
-        </p:style>
-        <p:txBody>
-          <a:bodyPr rtlCol="0" anchor="ctr"/>
-          <a:lstStyle/>
-          <a:p>
-            <a:pPr algn="ctr"/>
-            <a:r>
-              <a:rPr lang="en-GB" dirty="0"/>
-              <a:t>Noise gain</a:t>
-            </a:r>
-          </a:p>
-        </p:txBody>
-      </p:sp>
-      <p:sp>
-        <p:nvSpPr>
-          <p:cNvPr id="21" name="Rectangle 20">
-            <a:extLst>
-              <a:ext uri="{FF2B5EF4-FFF2-40B4-BE49-F238E27FC236}">
-                <a16:creationId xmlns:a16="http://schemas.microsoft.com/office/drawing/2014/main" id="{02AEF672-FD85-2390-0514-6C60008062CC}"/>
-              </a:ext>
-            </a:extLst>
-          </p:cNvPr>
-          <p:cNvSpPr/>
-          <p:nvPr/>
-        </p:nvSpPr>
-        <p:spPr>
-          <a:xfrm>
-            <a:off x="4849292" y="5262870"/>
-            <a:ext cx="1080000" cy="648000"/>
+            <a:off x="5410778" y="4814677"/>
+            <a:ext cx="1069359" cy="648000"/>
           </a:xfrm>
           <a:prstGeom prst="rect">
             <a:avLst/>
@@ -4663,85 +4898,32 @@
           <a:p>
             <a:pPr algn="ctr"/>
             <a:r>
-              <a:rPr lang="en-GB" dirty="0" err="1"/>
-              <a:t>Feedbackdelay</a:t>
-            </a:r>
-            <a:endParaRPr lang="en-GB" dirty="0"/>
-          </a:p>
-        </p:txBody>
-      </p:sp>
-      <p:sp>
-        <p:nvSpPr>
-          <p:cNvPr id="22" name="Rectangle 21">
-            <a:extLst>
-              <a:ext uri="{FF2B5EF4-FFF2-40B4-BE49-F238E27FC236}">
-                <a16:creationId xmlns:a16="http://schemas.microsoft.com/office/drawing/2014/main" id="{4D5F2028-8EAF-7477-3891-F280EE312EED}"/>
-              </a:ext>
-            </a:extLst>
-          </p:cNvPr>
-          <p:cNvSpPr/>
-          <p:nvPr/>
-        </p:nvSpPr>
-        <p:spPr>
-          <a:xfrm>
-            <a:off x="6742915" y="5266540"/>
-            <a:ext cx="1296000" cy="648000"/>
-          </a:xfrm>
-          <a:prstGeom prst="rect">
-            <a:avLst/>
-          </a:prstGeom>
-          <a:solidFill>
-            <a:srgbClr val="7030A0"/>
-          </a:solidFill>
-        </p:spPr>
-        <p:style>
-          <a:lnRef idx="2">
-            <a:schemeClr val="accent1">
-              <a:shade val="50000"/>
-            </a:schemeClr>
-          </a:lnRef>
-          <a:fillRef idx="1">
-            <a:schemeClr val="accent1"/>
-          </a:fillRef>
-          <a:effectRef idx="0">
-            <a:schemeClr val="accent1"/>
-          </a:effectRef>
-          <a:fontRef idx="minor">
-            <a:schemeClr val="lt1"/>
-          </a:fontRef>
-        </p:style>
-        <p:txBody>
-          <a:bodyPr rtlCol="0" anchor="ctr"/>
-          <a:lstStyle/>
-          <a:p>
-            <a:pPr algn="ctr"/>
-            <a:r>
               <a:rPr lang="en-GB" dirty="0"/>
-              <a:t>Output</a:t>
+              <a:t>Feedback delay</a:t>
             </a:r>
           </a:p>
         </p:txBody>
       </p:sp>
       <p:cxnSp>
         <p:nvCxnSpPr>
-          <p:cNvPr id="23" name="Straight Arrow Connector 22">
-            <a:extLst>
-              <a:ext uri="{FF2B5EF4-FFF2-40B4-BE49-F238E27FC236}">
-                <a16:creationId xmlns:a16="http://schemas.microsoft.com/office/drawing/2014/main" id="{87F928E8-0406-2D64-F73D-048E00F53311}"/>
+          <p:cNvPr id="45" name="Straight Arrow Connector 44">
+            <a:extLst>
+              <a:ext uri="{FF2B5EF4-FFF2-40B4-BE49-F238E27FC236}">
+                <a16:creationId xmlns:a16="http://schemas.microsoft.com/office/drawing/2014/main" id="{2639E5D2-0BFB-8459-75EC-5CE70A0AA8DB}"/>
               </a:ext>
             </a:extLst>
           </p:cNvPr>
           <p:cNvCxnSpPr>
             <a:cxnSpLocks/>
-            <a:stCxn id="20" idx="3"/>
-            <a:endCxn id="21" idx="1"/>
+            <a:stCxn id="44" idx="3"/>
+            <a:endCxn id="37" idx="1"/>
           </p:cNvCxnSpPr>
           <p:nvPr/>
         </p:nvCxnSpPr>
         <p:spPr>
-          <a:xfrm flipV="1">
-            <a:off x="4102153" y="5586870"/>
-            <a:ext cx="747139" cy="3670"/>
+          <a:xfrm>
+            <a:off x="6480137" y="5138677"/>
+            <a:ext cx="1432821" cy="80"/>
           </a:xfrm>
           <a:prstGeom prst="straightConnector1">
             <a:avLst/>
@@ -4770,33 +4952,33 @@
       </p:cxnSp>
       <p:cxnSp>
         <p:nvCxnSpPr>
-          <p:cNvPr id="28" name="Straight Arrow Connector 27">
-            <a:extLst>
-              <a:ext uri="{FF2B5EF4-FFF2-40B4-BE49-F238E27FC236}">
-                <a16:creationId xmlns:a16="http://schemas.microsoft.com/office/drawing/2014/main" id="{67DEB344-C7A0-3703-5133-C3B9ADA17950}"/>
+          <p:cNvPr id="63" name="Straight Arrow Connector 62">
+            <a:extLst>
+              <a:ext uri="{FF2B5EF4-FFF2-40B4-BE49-F238E27FC236}">
+                <a16:creationId xmlns:a16="http://schemas.microsoft.com/office/drawing/2014/main" id="{FA46E9D4-D0DB-778C-7EB3-B8F021EE7286}"/>
               </a:ext>
             </a:extLst>
           </p:cNvPr>
           <p:cNvCxnSpPr>
             <a:cxnSpLocks/>
-            <a:stCxn id="21" idx="3"/>
-            <a:endCxn id="22" idx="1"/>
           </p:cNvCxnSpPr>
           <p:nvPr/>
         </p:nvCxnSpPr>
         <p:spPr>
           <a:xfrm>
-            <a:off x="5929292" y="5586870"/>
-            <a:ext cx="813623" cy="3670"/>
+            <a:off x="5928105" y="3901254"/>
+            <a:ext cx="0" cy="779388"/>
           </a:xfrm>
           <a:prstGeom prst="straightConnector1">
             <a:avLst/>
           </a:prstGeom>
-          <a:ln w="31750">
+          <a:ln w="139700" cmpd="dbl">
             <a:solidFill>
-              <a:schemeClr val="tx1"/>
+              <a:srgbClr val="C00000"/>
             </a:solidFill>
-            <a:tailEnd type="arrow" w="lg" len="lg"/>
+            <a:round/>
+            <a:headEnd w="sm" len="lg"/>
+            <a:tailEnd type="stealth" w="med" len="med"/>
           </a:ln>
         </p:spPr>
         <p:style>
@@ -4816,10 +4998,10 @@
       </p:cxnSp>
       <p:sp>
         <p:nvSpPr>
-          <p:cNvPr id="29" name="Rectangle 28">
-            <a:extLst>
-              <a:ext uri="{FF2B5EF4-FFF2-40B4-BE49-F238E27FC236}">
-                <a16:creationId xmlns:a16="http://schemas.microsoft.com/office/drawing/2014/main" id="{8EC90D21-11C0-502E-32CF-9C0032B39F3B}"/>
+          <p:cNvPr id="64" name="Rectangle 63">
+            <a:extLst>
+              <a:ext uri="{FF2B5EF4-FFF2-40B4-BE49-F238E27FC236}">
+                <a16:creationId xmlns:a16="http://schemas.microsoft.com/office/drawing/2014/main" id="{8A1EDE7D-7A8E-E572-6B07-6181CEEA4F86}"/>
               </a:ext>
             </a:extLst>
           </p:cNvPr>
@@ -4828,20 +5010,24 @@
         </p:nvSpPr>
         <p:spPr>
           <a:xfrm>
-            <a:off x="1215350" y="5266540"/>
-            <a:ext cx="1122740" cy="648000"/>
+            <a:off x="4538714" y="1825995"/>
+            <a:ext cx="2794585" cy="2074218"/>
           </a:xfrm>
           <a:prstGeom prst="rect">
             <a:avLst/>
           </a:prstGeom>
-          <a:solidFill>
-            <a:srgbClr val="7030A0"/>
-          </a:solidFill>
+          <a:noFill/>
+          <a:ln w="25400">
+            <a:solidFill>
+              <a:srgbClr val="C00000"/>
+            </a:solidFill>
+            <a:prstDash val="dash"/>
+          </a:ln>
         </p:spPr>
         <p:style>
           <a:lnRef idx="2">
             <a:schemeClr val="accent1">
-              <a:shade val="50000"/>
+              <a:shade val="15000"/>
             </a:schemeClr>
           </a:lnRef>
           <a:fillRef idx="1">
@@ -4859,59 +5045,10 @@
           <a:lstStyle/>
           <a:p>
             <a:pPr algn="ctr"/>
-            <a:r>
-              <a:rPr lang="en-GB" dirty="0"/>
-              <a:t>Noise</a:t>
-            </a:r>
-          </a:p>
-        </p:txBody>
-      </p:sp>
-      <p:cxnSp>
-        <p:nvCxnSpPr>
-          <p:cNvPr id="30" name="Straight Arrow Connector 29">
-            <a:extLst>
-              <a:ext uri="{FF2B5EF4-FFF2-40B4-BE49-F238E27FC236}">
-                <a16:creationId xmlns:a16="http://schemas.microsoft.com/office/drawing/2014/main" id="{F5D85A68-1897-CC45-3E7F-9B830179919A}"/>
-              </a:ext>
-            </a:extLst>
-          </p:cNvPr>
-          <p:cNvCxnSpPr>
-            <a:cxnSpLocks/>
-            <a:stCxn id="29" idx="3"/>
-            <a:endCxn id="20" idx="1"/>
-          </p:cNvCxnSpPr>
-          <p:nvPr/>
-        </p:nvCxnSpPr>
-        <p:spPr>
-          <a:xfrm>
-            <a:off x="2338090" y="5590540"/>
-            <a:ext cx="641323" cy="0"/>
-          </a:xfrm>
-          <a:prstGeom prst="straightConnector1">
-            <a:avLst/>
-          </a:prstGeom>
-          <a:ln w="31750">
-            <a:solidFill>
-              <a:schemeClr val="tx1"/>
-            </a:solidFill>
-            <a:tailEnd type="arrow" w="lg" len="lg"/>
-          </a:ln>
-        </p:spPr>
-        <p:style>
-          <a:lnRef idx="1">
-            <a:schemeClr val="accent1"/>
-          </a:lnRef>
-          <a:fillRef idx="0">
-            <a:schemeClr val="accent1"/>
-          </a:fillRef>
-          <a:effectRef idx="0">
-            <a:schemeClr val="accent1"/>
-          </a:effectRef>
-          <a:fontRef idx="minor">
-            <a:schemeClr val="tx1"/>
-          </a:fontRef>
-        </p:style>
-      </p:cxnSp>
+            <a:endParaRPr lang="en-GB"/>
+          </a:p>
+        </p:txBody>
+      </p:sp>
     </p:spTree>
     <p:extLst>
       <p:ext uri="{BB962C8B-B14F-4D97-AF65-F5344CB8AC3E}">
